--- a/media/module6/slides.pptx
+++ b/media/module6/slides.pptx
@@ -36,6 +36,17 @@
     <p:sldId id="284" r:id="rId36"/>
     <p:sldId id="285" r:id="rId37"/>
     <p:sldId id="286" r:id="rId38"/>
+    <p:sldId id="287" r:id="rId39"/>
+    <p:sldId id="288" r:id="rId40"/>
+    <p:sldId id="289" r:id="rId41"/>
+    <p:sldId id="290" r:id="rId42"/>
+    <p:sldId id="291" r:id="rId43"/>
+    <p:sldId id="292" r:id="rId44"/>
+    <p:sldId id="293" r:id="rId45"/>
+    <p:sldId id="294" r:id="rId46"/>
+    <p:sldId id="295" r:id="rId47"/>
+    <p:sldId id="296" r:id="rId48"/>
+    <p:sldId id="297" r:id="rId49"/>
   </p:sldIdLst>
   <p:sldSz cx="12191695" cy="6858000" type="screen4x3"/>
   <p:notesSz cx="6858000" cy="9144000"/>
@@ -602,7 +613,7 @@
           <a:lstStyle/>
           <a:p>
             <a:r>
-              <a:t>Run from course repository root.</a:t>
+              <a:t>From MODULE6 Verification &amp; Testing Methods.</a:t>
             </a:r>
           </a:p>
         </p:txBody>
@@ -672,7 +683,7 @@
           <a:lstStyle/>
           <a:p>
             <a:r>
-              <a:t>module6/examples/examples/spi_uvm/README.md</a:t>
+              <a:t>From MODULE6 Topics Covered.</a:t>
             </a:r>
           </a:p>
         </p:txBody>
@@ -742,7 +753,7 @@
           <a:lstStyle/>
           <a:p>
             <a:r>
-              <a:t>Hands-on: module6/examples/examples/spi_uvm/</a:t>
+              <a:t>From MODULE6 Topics Covered.</a:t>
             </a:r>
           </a:p>
         </p:txBody>
@@ -812,7 +823,427 @@
           <a:lstStyle/>
           <a:p>
             <a:r>
-              <a:t>From MODULE6 Learning Outcomes.</a:t>
+              <a:t>Run from course repository root.</a:t>
+            </a:r>
+          </a:p>
+        </p:txBody>
+      </p:sp>
+      <p:sp>
+        <p:nvSpPr>
+          <p:cNvPr id="4" name="Slide Number Placeholder 3"/>
+          <p:cNvSpPr>
+            <a:spLocks noGrp="1"/>
+          </p:cNvSpPr>
+          <p:nvPr>
+            <p:ph type="sldNum" idx="5" sz="quarter"/>
+          </p:nvPr>
+        </p:nvSpPr>
+        <p:spPr/>
+      </p:sp>
+    </p:spTree>
+  </p:cSld>
+  <p:clrMapOvr>
+    <a:masterClrMapping/>
+  </p:clrMapOvr>
+</p:notes>
+</file>
+
+<file path=ppt/notesSlides/notesSlide14.xml><?xml version="1.0" encoding="utf-8"?>
+<p:notes xmlns:a="http://schemas.openxmlformats.org/drawingml/2006/main" xmlns:p="http://schemas.openxmlformats.org/presentationml/2006/main" xmlns:r="http://schemas.openxmlformats.org/officeDocument/2006/relationships">
+  <p:cSld>
+    <p:spTree>
+      <p:nvGrpSpPr>
+        <p:cNvPr id="1" name=""/>
+        <p:cNvGrpSpPr/>
+        <p:nvPr/>
+      </p:nvGrpSpPr>
+      <p:grpSpPr>
+        <a:xfrm>
+          <a:off x="0" y="0"/>
+          <a:ext cx="0" cy="0"/>
+          <a:chOff x="0" y="0"/>
+          <a:chExt cx="0" cy="0"/>
+        </a:xfrm>
+      </p:grpSpPr>
+      <p:sp>
+        <p:nvSpPr>
+          <p:cNvPr id="2" name="Slide Image Placeholder 1"/>
+          <p:cNvSpPr>
+            <a:spLocks noGrp="1"/>
+          </p:cNvSpPr>
+          <p:nvPr>
+            <p:ph type="sldImg" idx="2"/>
+          </p:nvPr>
+        </p:nvSpPr>
+        <p:spPr/>
+      </p:sp>
+      <p:sp>
+        <p:nvSpPr>
+          <p:cNvPr id="3" name="Notes Placeholder 2"/>
+          <p:cNvSpPr>
+            <a:spLocks noGrp="1"/>
+          </p:cNvSpPr>
+          <p:nvPr>
+            <p:ph type="body" idx="3" sz="quarter"/>
+          </p:nvPr>
+        </p:nvSpPr>
+        <p:spPr/>
+        <p:txBody>
+          <a:bodyPr/>
+          <a:lstStyle/>
+          <a:p>
+            <a:r>
+              <a:t>module6/examples/spi_uvm/README.md</a:t>
+            </a:r>
+          </a:p>
+        </p:txBody>
+      </p:sp>
+      <p:sp>
+        <p:nvSpPr>
+          <p:cNvPr id="4" name="Slide Number Placeholder 3"/>
+          <p:cNvSpPr>
+            <a:spLocks noGrp="1"/>
+          </p:cNvSpPr>
+          <p:nvPr>
+            <p:ph type="sldNum" idx="5" sz="quarter"/>
+          </p:nvPr>
+        </p:nvSpPr>
+        <p:spPr/>
+      </p:sp>
+    </p:spTree>
+  </p:cSld>
+  <p:clrMapOvr>
+    <a:masterClrMapping/>
+  </p:clrMapOvr>
+</p:notes>
+</file>
+
+<file path=ppt/notesSlides/notesSlide15.xml><?xml version="1.0" encoding="utf-8"?>
+<p:notes xmlns:a="http://schemas.openxmlformats.org/drawingml/2006/main" xmlns:p="http://schemas.openxmlformats.org/presentationml/2006/main" xmlns:r="http://schemas.openxmlformats.org/officeDocument/2006/relationships">
+  <p:cSld>
+    <p:spTree>
+      <p:nvGrpSpPr>
+        <p:cNvPr id="1" name=""/>
+        <p:cNvGrpSpPr/>
+        <p:nvPr/>
+      </p:nvGrpSpPr>
+      <p:grpSpPr>
+        <a:xfrm>
+          <a:off x="0" y="0"/>
+          <a:ext cx="0" cy="0"/>
+          <a:chOff x="0" y="0"/>
+          <a:chExt cx="0" cy="0"/>
+        </a:xfrm>
+      </p:grpSpPr>
+      <p:sp>
+        <p:nvSpPr>
+          <p:cNvPr id="2" name="Slide Image Placeholder 1"/>
+          <p:cNvSpPr>
+            <a:spLocks noGrp="1"/>
+          </p:cNvSpPr>
+          <p:nvPr>
+            <p:ph type="sldImg" idx="2"/>
+          </p:nvPr>
+        </p:nvSpPr>
+        <p:spPr/>
+      </p:sp>
+      <p:sp>
+        <p:nvSpPr>
+          <p:cNvPr id="3" name="Notes Placeholder 2"/>
+          <p:cNvSpPr>
+            <a:spLocks noGrp="1"/>
+          </p:cNvSpPr>
+          <p:nvPr>
+            <p:ph type="body" idx="3" sz="quarter"/>
+          </p:nvPr>
+        </p:nvSpPr>
+        <p:spPr/>
+        <p:txBody>
+          <a:bodyPr/>
+          <a:lstStyle/>
+          <a:p>
+            <a:r>
+              <a:t>Hands-on: module6/examples/spi_uvm/</a:t>
+            </a:r>
+          </a:p>
+        </p:txBody>
+      </p:sp>
+      <p:sp>
+        <p:nvSpPr>
+          <p:cNvPr id="4" name="Slide Number Placeholder 3"/>
+          <p:cNvSpPr>
+            <a:spLocks noGrp="1"/>
+          </p:cNvSpPr>
+          <p:nvPr>
+            <p:ph type="sldNum" idx="5" sz="quarter"/>
+          </p:nvPr>
+        </p:nvSpPr>
+        <p:spPr/>
+      </p:sp>
+    </p:spTree>
+  </p:cSld>
+  <p:clrMapOvr>
+    <a:masterClrMapping/>
+  </p:clrMapOvr>
+</p:notes>
+</file>
+
+<file path=ppt/notesSlides/notesSlide16.xml><?xml version="1.0" encoding="utf-8"?>
+<p:notes xmlns:a="http://schemas.openxmlformats.org/drawingml/2006/main" xmlns:p="http://schemas.openxmlformats.org/presentationml/2006/main" xmlns:r="http://schemas.openxmlformats.org/officeDocument/2006/relationships">
+  <p:cSld>
+    <p:spTree>
+      <p:nvGrpSpPr>
+        <p:cNvPr id="1" name=""/>
+        <p:cNvGrpSpPr/>
+        <p:nvPr/>
+      </p:nvGrpSpPr>
+      <p:grpSpPr>
+        <a:xfrm>
+          <a:off x="0" y="0"/>
+          <a:ext cx="0" cy="0"/>
+          <a:chOff x="0" y="0"/>
+          <a:chExt cx="0" cy="0"/>
+        </a:xfrm>
+      </p:grpSpPr>
+      <p:sp>
+        <p:nvSpPr>
+          <p:cNvPr id="2" name="Slide Image Placeholder 1"/>
+          <p:cNvSpPr>
+            <a:spLocks noGrp="1"/>
+          </p:cNvSpPr>
+          <p:nvPr>
+            <p:ph type="sldImg" idx="2"/>
+          </p:nvPr>
+        </p:nvSpPr>
+        <p:spPr/>
+      </p:sp>
+      <p:sp>
+        <p:nvSpPr>
+          <p:cNvPr id="3" name="Notes Placeholder 2"/>
+          <p:cNvSpPr>
+            <a:spLocks noGrp="1"/>
+          </p:cNvSpPr>
+          <p:nvPr>
+            <p:ph type="body" idx="3" sz="quarter"/>
+          </p:nvPr>
+        </p:nvSpPr>
+        <p:spPr/>
+        <p:txBody>
+          <a:bodyPr/>
+          <a:lstStyle/>
+          <a:p>
+            <a:r>
+              <a:t>From MODULE6 Key Concepts.</a:t>
+            </a:r>
+          </a:p>
+        </p:txBody>
+      </p:sp>
+      <p:sp>
+        <p:nvSpPr>
+          <p:cNvPr id="4" name="Slide Number Placeholder 3"/>
+          <p:cNvSpPr>
+            <a:spLocks noGrp="1"/>
+          </p:cNvSpPr>
+          <p:nvPr>
+            <p:ph type="sldNum" idx="5" sz="quarter"/>
+          </p:nvPr>
+        </p:nvSpPr>
+        <p:spPr/>
+      </p:sp>
+    </p:spTree>
+  </p:cSld>
+  <p:clrMapOvr>
+    <a:masterClrMapping/>
+  </p:clrMapOvr>
+</p:notes>
+</file>
+
+<file path=ppt/notesSlides/notesSlide17.xml><?xml version="1.0" encoding="utf-8"?>
+<p:notes xmlns:a="http://schemas.openxmlformats.org/drawingml/2006/main" xmlns:p="http://schemas.openxmlformats.org/presentationml/2006/main" xmlns:r="http://schemas.openxmlformats.org/officeDocument/2006/relationships">
+  <p:cSld>
+    <p:spTree>
+      <p:nvGrpSpPr>
+        <p:cNvPr id="1" name=""/>
+        <p:cNvGrpSpPr/>
+        <p:nvPr/>
+      </p:nvGrpSpPr>
+      <p:grpSpPr>
+        <a:xfrm>
+          <a:off x="0" y="0"/>
+          <a:ext cx="0" cy="0"/>
+          <a:chOff x="0" y="0"/>
+          <a:chExt cx="0" cy="0"/>
+        </a:xfrm>
+      </p:grpSpPr>
+      <p:sp>
+        <p:nvSpPr>
+          <p:cNvPr id="2" name="Slide Image Placeholder 1"/>
+          <p:cNvSpPr>
+            <a:spLocks noGrp="1"/>
+          </p:cNvSpPr>
+          <p:nvPr>
+            <p:ph type="sldImg" idx="2"/>
+          </p:nvPr>
+        </p:nvSpPr>
+        <p:spPr/>
+      </p:sp>
+      <p:sp>
+        <p:nvSpPr>
+          <p:cNvPr id="3" name="Notes Placeholder 2"/>
+          <p:cNvSpPr>
+            <a:spLocks noGrp="1"/>
+          </p:cNvSpPr>
+          <p:nvPr>
+            <p:ph type="body" idx="3" sz="quarter"/>
+          </p:nvPr>
+        </p:nvSpPr>
+        <p:spPr/>
+        <p:txBody>
+          <a:bodyPr/>
+          <a:lstStyle/>
+          <a:p>
+            <a:r>
+              <a:t>From MODULE6 Key Concepts.</a:t>
+            </a:r>
+          </a:p>
+        </p:txBody>
+      </p:sp>
+      <p:sp>
+        <p:nvSpPr>
+          <p:cNvPr id="4" name="Slide Number Placeholder 3"/>
+          <p:cNvSpPr>
+            <a:spLocks noGrp="1"/>
+          </p:cNvSpPr>
+          <p:nvPr>
+            <p:ph type="sldNum" idx="5" sz="quarter"/>
+          </p:nvPr>
+        </p:nvSpPr>
+        <p:spPr/>
+      </p:sp>
+    </p:spTree>
+  </p:cSld>
+  <p:clrMapOvr>
+    <a:masterClrMapping/>
+  </p:clrMapOvr>
+</p:notes>
+</file>
+
+<file path=ppt/notesSlides/notesSlide18.xml><?xml version="1.0" encoding="utf-8"?>
+<p:notes xmlns:a="http://schemas.openxmlformats.org/drawingml/2006/main" xmlns:p="http://schemas.openxmlformats.org/presentationml/2006/main" xmlns:r="http://schemas.openxmlformats.org/officeDocument/2006/relationships">
+  <p:cSld>
+    <p:spTree>
+      <p:nvGrpSpPr>
+        <p:cNvPr id="1" name=""/>
+        <p:cNvGrpSpPr/>
+        <p:nvPr/>
+      </p:nvGrpSpPr>
+      <p:grpSpPr>
+        <a:xfrm>
+          <a:off x="0" y="0"/>
+          <a:ext cx="0" cy="0"/>
+          <a:chOff x="0" y="0"/>
+          <a:chExt cx="0" cy="0"/>
+        </a:xfrm>
+      </p:grpSpPr>
+      <p:sp>
+        <p:nvSpPr>
+          <p:cNvPr id="2" name="Slide Image Placeholder 1"/>
+          <p:cNvSpPr>
+            <a:spLocks noGrp="1"/>
+          </p:cNvSpPr>
+          <p:nvPr>
+            <p:ph type="sldImg" idx="2"/>
+          </p:nvPr>
+        </p:nvSpPr>
+        <p:spPr/>
+      </p:sp>
+      <p:sp>
+        <p:nvSpPr>
+          <p:cNvPr id="3" name="Notes Placeholder 2"/>
+          <p:cNvSpPr>
+            <a:spLocks noGrp="1"/>
+          </p:cNvSpPr>
+          <p:nvPr>
+            <p:ph type="body" idx="3" sz="quarter"/>
+          </p:nvPr>
+        </p:nvSpPr>
+        <p:spPr/>
+        <p:txBody>
+          <a:bodyPr/>
+          <a:lstStyle/>
+          <a:p>
+            <a:r>
+              <a:t>From MODULE6 Common Pitfalls.</a:t>
+            </a:r>
+          </a:p>
+        </p:txBody>
+      </p:sp>
+      <p:sp>
+        <p:nvSpPr>
+          <p:cNvPr id="4" name="Slide Number Placeholder 3"/>
+          <p:cNvSpPr>
+            <a:spLocks noGrp="1"/>
+          </p:cNvSpPr>
+          <p:nvPr>
+            <p:ph type="sldNum" idx="5" sz="quarter"/>
+          </p:nvPr>
+        </p:nvSpPr>
+        <p:spPr/>
+      </p:sp>
+    </p:spTree>
+  </p:cSld>
+  <p:clrMapOvr>
+    <a:masterClrMapping/>
+  </p:clrMapOvr>
+</p:notes>
+</file>
+
+<file path=ppt/notesSlides/notesSlide19.xml><?xml version="1.0" encoding="utf-8"?>
+<p:notes xmlns:a="http://schemas.openxmlformats.org/drawingml/2006/main" xmlns:p="http://schemas.openxmlformats.org/presentationml/2006/main" xmlns:r="http://schemas.openxmlformats.org/officeDocument/2006/relationships">
+  <p:cSld>
+    <p:spTree>
+      <p:nvGrpSpPr>
+        <p:cNvPr id="1" name=""/>
+        <p:cNvGrpSpPr/>
+        <p:nvPr/>
+      </p:nvGrpSpPr>
+      <p:grpSpPr>
+        <a:xfrm>
+          <a:off x="0" y="0"/>
+          <a:ext cx="0" cy="0"/>
+          <a:chOff x="0" y="0"/>
+          <a:chExt cx="0" cy="0"/>
+        </a:xfrm>
+      </p:grpSpPr>
+      <p:sp>
+        <p:nvSpPr>
+          <p:cNvPr id="2" name="Slide Image Placeholder 1"/>
+          <p:cNvSpPr>
+            <a:spLocks noGrp="1"/>
+          </p:cNvSpPr>
+          <p:nvPr>
+            <p:ph type="sldImg" idx="2"/>
+          </p:nvPr>
+        </p:nvSpPr>
+        <p:spPr/>
+      </p:sp>
+      <p:sp>
+        <p:nvSpPr>
+          <p:cNvPr id="3" name="Notes Placeholder 2"/>
+          <p:cNvSpPr>
+            <a:spLocks noGrp="1"/>
+          </p:cNvSpPr>
+          <p:nvPr>
+            <p:ph type="body" idx="3" sz="quarter"/>
+          </p:nvPr>
+        </p:nvSpPr>
+        <p:spPr/>
+        <p:txBody>
+          <a:bodyPr/>
+          <a:lstStyle/>
+          <a:p>
+            <a:r>
+              <a:t>From MODULE6 Common Pitfalls.</a:t>
             </a:r>
           </a:p>
         </p:txBody>
@@ -907,6 +1338,76 @@
 </p:notes>
 </file>
 
+<file path=ppt/notesSlides/notesSlide20.xml><?xml version="1.0" encoding="utf-8"?>
+<p:notes xmlns:a="http://schemas.openxmlformats.org/drawingml/2006/main" xmlns:p="http://schemas.openxmlformats.org/presentationml/2006/main" xmlns:r="http://schemas.openxmlformats.org/officeDocument/2006/relationships">
+  <p:cSld>
+    <p:spTree>
+      <p:nvGrpSpPr>
+        <p:cNvPr id="1" name=""/>
+        <p:cNvGrpSpPr/>
+        <p:nvPr/>
+      </p:nvGrpSpPr>
+      <p:grpSpPr>
+        <a:xfrm>
+          <a:off x="0" y="0"/>
+          <a:ext cx="0" cy="0"/>
+          <a:chOff x="0" y="0"/>
+          <a:chExt cx="0" cy="0"/>
+        </a:xfrm>
+      </p:grpSpPr>
+      <p:sp>
+        <p:nvSpPr>
+          <p:cNvPr id="2" name="Slide Image Placeholder 1"/>
+          <p:cNvSpPr>
+            <a:spLocks noGrp="1"/>
+          </p:cNvSpPr>
+          <p:nvPr>
+            <p:ph type="sldImg" idx="2"/>
+          </p:nvPr>
+        </p:nvSpPr>
+        <p:spPr/>
+      </p:sp>
+      <p:sp>
+        <p:nvSpPr>
+          <p:cNvPr id="3" name="Notes Placeholder 2"/>
+          <p:cNvSpPr>
+            <a:spLocks noGrp="1"/>
+          </p:cNvSpPr>
+          <p:nvPr>
+            <p:ph type="body" idx="3" sz="quarter"/>
+          </p:nvPr>
+        </p:nvSpPr>
+        <p:spPr/>
+        <p:txBody>
+          <a:bodyPr/>
+          <a:lstStyle/>
+          <a:p>
+            <a:r>
+              <a:t>From MODULE6 Learning Outcomes.</a:t>
+            </a:r>
+          </a:p>
+        </p:txBody>
+      </p:sp>
+      <p:sp>
+        <p:nvSpPr>
+          <p:cNvPr id="4" name="Slide Number Placeholder 3"/>
+          <p:cNvSpPr>
+            <a:spLocks noGrp="1"/>
+          </p:cNvSpPr>
+          <p:nvPr>
+            <p:ph type="sldNum" idx="5" sz="quarter"/>
+          </p:nvPr>
+        </p:nvSpPr>
+        <p:spPr/>
+      </p:sp>
+    </p:spTree>
+  </p:cSld>
+  <p:clrMapOvr>
+    <a:masterClrMapping/>
+  </p:clrMapOvr>
+</p:notes>
+</file>
+
 <file path=ppt/notesSlides/notesSlide3.xml><?xml version="1.0" encoding="utf-8"?>
 <p:notes xmlns:a="http://schemas.openxmlformats.org/drawingml/2006/main" xmlns:p="http://schemas.openxmlformats.org/presentationml/2006/main" xmlns:r="http://schemas.openxmlformats.org/officeDocument/2006/relationships">
   <p:cSld>
@@ -1092,7 +1593,7 @@
           <a:lstStyle/>
           <a:p>
             <a:r>
-              <a:t>From MODULE6 Verification &amp; Testing Methods.</a:t>
+              <a:t>From MODULE6 — execution and artifact layout.</a:t>
             </a:r>
           </a:p>
         </p:txBody>
@@ -1162,7 +1663,7 @@
           <a:lstStyle/>
           <a:p>
             <a:r>
-              <a:t>From MODULE6 Verification &amp; Testing Methods.</a:t>
+              <a:t>Match each path to files under module/examples/.</a:t>
             </a:r>
           </a:p>
         </p:txBody>
@@ -1232,7 +1733,7 @@
           <a:lstStyle/>
           <a:p>
             <a:r>
-              <a:t>From MODULE6 Verification &amp; Testing Methods.</a:t>
+              <a:t>Trace while running module6/EXAMPLES.md labs.</a:t>
             </a:r>
           </a:p>
         </p:txBody>
@@ -1302,7 +1803,7 @@
           <a:lstStyle/>
           <a:p>
             <a:r>
-              <a:t>From MODULE6 Topics Covered.</a:t>
+              <a:t>From MODULE6 Verification &amp; Testing Methods.</a:t>
             </a:r>
           </a:p>
         </p:txBody>
@@ -1372,7 +1873,7 @@
           <a:lstStyle/>
           <a:p>
             <a:r>
-              <a:t>From MODULE6 Topics Covered.</a:t>
+              <a:t>From MODULE6 Verification &amp; Testing Methods.</a:t>
             </a:r>
           </a:p>
         </p:txBody>
@@ -4530,14 +5031,189 @@
               </a:defRPr>
             </a:pPr>
             <a:r>
-              <a:t>Verification environment architecture</a:t>
+              <a:t>2. UVM agent structure</a:t>
+            </a:r>
+          </a:p>
+        </p:txBody>
+      </p:sp>
+      <p:sp>
+        <p:nvSpPr>
+          <p:cNvPr id="3" name="TextBox 2"/>
+          <p:cNvSpPr txBox="1"/>
+          <p:nvPr/>
+        </p:nvSpPr>
+        <p:spPr>
+          <a:xfrm>
+            <a:off x="548640" y="1234440"/>
+            <a:ext cx="5303520" cy="4754880"/>
+          </a:xfrm>
+          <a:prstGeom prst="rect">
+            <a:avLst/>
+          </a:prstGeom>
+          <a:noFill/>
+        </p:spPr>
+        <p:txBody>
+          <a:bodyPr wrap="square">
+            <a:noAutofit/>
+          </a:bodyPr>
+          <a:lstStyle/>
+          <a:p>
+            <a:pPr>
+              <a:lnSpc>
+                <a:spcPts val="2200"/>
+              </a:lnSpc>
+              <a:spcAft>
+                <a:spcPts val="1000"/>
+              </a:spcAft>
+              <a:defRPr sz="2000" b="0">
+                <a:solidFill>
+                  <a:srgbClr val="333333"/>
+                </a:solidFill>
+                <a:latin typeface="Calibri"/>
+              </a:defRPr>
+            </a:pPr>
+            <a:r>
+              <a:t>• SpiTransaction = one byte;</a:t>
+            </a:r>
+          </a:p>
+          <a:p>
+            <a:pPr>
+              <a:lnSpc>
+                <a:spcPts val="2200"/>
+              </a:lnSpc>
+              <a:spcAft>
+                <a:spcPts val="1000"/>
+              </a:spcAft>
+              <a:defRPr sz="2000" b="0">
+                <a:solidFill>
+                  <a:srgbClr val="333333"/>
+                </a:solidFill>
+                <a:latin typeface="Calibri"/>
+              </a:defRPr>
+            </a:pPr>
+            <a:r>
+              <a:t>      SpiSequence = directed list;</a:t>
+            </a:r>
+          </a:p>
+          <a:p>
+            <a:pPr>
+              <a:lnSpc>
+                <a:spcPts val="2200"/>
+              </a:lnSpc>
+              <a:spcAft>
+                <a:spcPts val="1000"/>
+              </a:spcAft>
+              <a:defRPr sz="2000" b="0">
+                <a:solidFill>
+                  <a:srgbClr val="333333"/>
+                </a:solidFill>
+                <a:latin typeface="Calibri"/>
+              </a:defRPr>
+            </a:pPr>
+            <a:r>
+              <a:t>      SpiDriver waits on `done`.</a:t>
+            </a:r>
+          </a:p>
+          <a:p>
+            <a:pPr>
+              <a:lnSpc>
+                <a:spcPts val="2200"/>
+              </a:lnSpc>
+              <a:spcAft>
+                <a:spcPts val="1000"/>
+              </a:spcAft>
+              <a:defRPr sz="2000" b="0">
+                <a:solidFill>
+                  <a:srgbClr val="333333"/>
+                </a:solidFill>
+                <a:latin typeface="Calibri"/>
+              </a:defRPr>
+            </a:pPr>
+            <a:r>
+              <a:t>• SpiMonitor samples MOSI on</a:t>
+            </a:r>
+          </a:p>
+          <a:p>
+            <a:pPr>
+              <a:lnSpc>
+                <a:spcPts val="2200"/>
+              </a:lnSpc>
+              <a:spcAft>
+                <a:spcPts val="1000"/>
+              </a:spcAft>
+              <a:defRPr sz="2000" b="0">
+                <a:solidFill>
+                  <a:srgbClr val="333333"/>
+                </a:solidFill>
+                <a:latin typeface="Calibri"/>
+              </a:defRPr>
+            </a:pPr>
+            <a:r>
+              <a:t>      rising SCLK while `cs_n` is low</a:t>
+            </a:r>
+          </a:p>
+          <a:p>
+            <a:pPr>
+              <a:lnSpc>
+                <a:spcPts val="2200"/>
+              </a:lnSpc>
+              <a:spcAft>
+                <a:spcPts val="1000"/>
+              </a:spcAft>
+              <a:defRPr sz="2000" b="0">
+                <a:solidFill>
+                  <a:srgbClr val="333333"/>
+                </a:solidFill>
+                <a:latin typeface="Calibri"/>
+              </a:defRPr>
+            </a:pPr>
+            <a:r>
+              <a:t>      (Mode 0, MSB first).</a:t>
+            </a:r>
+          </a:p>
+          <a:p>
+            <a:pPr>
+              <a:lnSpc>
+                <a:spcPts val="2200"/>
+              </a:lnSpc>
+              <a:spcAft>
+                <a:spcPts val="1000"/>
+              </a:spcAft>
+              <a:defRPr sz="2000" b="0">
+                <a:solidFill>
+                  <a:srgbClr val="333333"/>
+                </a:solidFill>
+                <a:latin typeface="Calibri"/>
+              </a:defRPr>
+            </a:pPr>
+            <a:r>
+              <a:t>• SpiScoreboard compares expected</a:t>
+            </a:r>
+          </a:p>
+          <a:p>
+            <a:pPr>
+              <a:lnSpc>
+                <a:spcPts val="2200"/>
+              </a:lnSpc>
+              <a:spcAft>
+                <a:spcPts val="1000"/>
+              </a:spcAft>
+              <a:defRPr sz="2000" b="0">
+                <a:solidFill>
+                  <a:srgbClr val="333333"/>
+                </a:solidFill>
+                <a:latin typeface="Calibri"/>
+              </a:defRPr>
+            </a:pPr>
+            <a:r>
+              <a:t>      vs `observed_mosi`.</a:t>
             </a:r>
           </a:p>
         </p:txBody>
       </p:sp>
       <p:pic>
         <p:nvPicPr>
-          <p:cNvPr id="3" name="Picture 2" descr="verification_architecture.png"/>
+          <p:cNvPr id="4" name="Picture 3" descr="verification_architecture.png"/>
           <p:cNvPicPr>
             <a:picLocks noChangeAspect="1"/>
           </p:cNvPicPr>
@@ -4551,53 +5227,14 @@
         </p:blipFill>
         <p:spPr>
           <a:xfrm>
-            <a:off x="548640" y="1143000"/>
-            <a:ext cx="8128000" cy="4572000"/>
+            <a:off x="6172200" y="2094547"/>
+            <a:ext cx="5394960" cy="3034665"/>
           </a:xfrm>
           <a:prstGeom prst="rect">
             <a:avLst/>
           </a:prstGeom>
         </p:spPr>
       </p:pic>
-      <p:sp>
-        <p:nvSpPr>
-          <p:cNvPr id="4" name="TextBox 3"/>
-          <p:cNvSpPr txBox="1"/>
-          <p:nvPr/>
-        </p:nvSpPr>
-        <p:spPr>
-          <a:xfrm>
-            <a:off x="548640" y="5897880"/>
-            <a:ext cx="11064240" cy="411480"/>
-          </a:xfrm>
-          <a:prstGeom prst="rect">
-            <a:avLst/>
-          </a:prstGeom>
-          <a:noFill/>
-        </p:spPr>
-        <p:txBody>
-          <a:bodyPr wrap="square">
-            <a:noAutofit/>
-          </a:bodyPr>
-          <a:lstStyle/>
-          <a:p>
-            <a:pPr>
-              <a:lnSpc>
-                <a:spcPts val="2200"/>
-              </a:lnSpc>
-              <a:defRPr sz="1200" b="0">
-                <a:solidFill>
-                  <a:srgbClr val="333333"/>
-                </a:solidFill>
-                <a:latin typeface="Calibri"/>
-              </a:defRPr>
-            </a:pPr>
-            <a:r>
-              <a:t>Module 6: UVM layers, agents, and checkers for this phase.</a:t>
-            </a:r>
-          </a:p>
-        </p:txBody>
-      </p:sp>
       <p:sp>
         <p:nvSpPr>
           <p:cNvPr id="5" name="TextBox 4"/>
@@ -4689,7 +5326,7 @@
               </a:defRPr>
             </a:pPr>
             <a:r>
-              <a:t>1. SPI DUT (reused from Module 5)</a:t>
+              <a:t>3. Bus vs DUT checking</a:t>
             </a:r>
           </a:p>
         </p:txBody>
@@ -4703,7 +5340,7 @@
         <p:spPr>
           <a:xfrm>
             <a:off x="548640" y="1234440"/>
-            <a:ext cx="11064240" cy="4937760"/>
+            <a:ext cx="5303520" cy="4754880"/>
           </a:xfrm>
           <a:prstGeom prst="rect">
             <a:avLst/>
@@ -4731,7 +5368,7 @@
               </a:defRPr>
             </a:pPr>
             <a:r>
-              <a:t>• spi_master + clk_div in</a:t>
+              <a:t>• Monitor validates wire behavior;</a:t>
             </a:r>
           </a:p>
           <a:p>
@@ -4750,7 +5387,7 @@
               </a:defRPr>
             </a:pPr>
             <a:r>
-              <a:t>      `module6/examples/spi_uvm/dut/`.</a:t>
+              <a:t>      `done` alone is not sufficient</a:t>
             </a:r>
           </a:p>
           <a:p>
@@ -4769,14 +5406,38 @@
               </a:defRPr>
             </a:pPr>
             <a:r>
-              <a:t>• spi_master_if connects UVM to DUT pins.</a:t>
-            </a:r>
-          </a:p>
-        </p:txBody>
-      </p:sp>
-      <p:sp>
-        <p:nvSpPr>
-          <p:cNvPr id="4" name="TextBox 3"/>
+              <a:t>      for sign-off.</a:t>
+            </a:r>
+          </a:p>
+        </p:txBody>
+      </p:sp>
+      <p:pic>
+        <p:nvPicPr>
+          <p:cNvPr id="4" name="Picture 3" descr="testing_methods.png"/>
+          <p:cNvPicPr>
+            <a:picLocks noChangeAspect="1"/>
+          </p:cNvPicPr>
+          <p:nvPr/>
+        </p:nvPicPr>
+        <p:blipFill>
+          <a:blip r:embed="rId2"/>
+          <a:stretch>
+            <a:fillRect/>
+          </a:stretch>
+        </p:blipFill>
+        <p:spPr>
+          <a:xfrm>
+            <a:off x="6172200" y="2094547"/>
+            <a:ext cx="5394960" cy="3034665"/>
+          </a:xfrm>
+          <a:prstGeom prst="rect">
+            <a:avLst/>
+          </a:prstGeom>
+        </p:spPr>
+      </p:pic>
+      <p:sp>
+        <p:nvSpPr>
+          <p:cNvPr id="5" name="TextBox 4"/>
           <p:cNvSpPr txBox="1"/>
           <p:nvPr/>
         </p:nvSpPr>
@@ -4865,21 +5526,45 @@
               </a:defRPr>
             </a:pPr>
             <a:r>
-              <a:t>2. UVM agent structure</a:t>
-            </a:r>
-          </a:p>
-        </p:txBody>
-      </p:sp>
-      <p:sp>
-        <p:nvSpPr>
-          <p:cNvPr id="3" name="TextBox 2"/>
+              <a:t>RTL block diagram (reference)</a:t>
+            </a:r>
+          </a:p>
+        </p:txBody>
+      </p:sp>
+      <p:pic>
+        <p:nvPicPr>
+          <p:cNvPr id="3" name="Picture 2" descr="rtl_architecture.png"/>
+          <p:cNvPicPr>
+            <a:picLocks noChangeAspect="1"/>
+          </p:cNvPicPr>
+          <p:nvPr/>
+        </p:nvPicPr>
+        <p:blipFill>
+          <a:blip r:embed="rId2"/>
+          <a:stretch>
+            <a:fillRect/>
+          </a:stretch>
+        </p:blipFill>
+        <p:spPr>
+          <a:xfrm>
+            <a:off x="548640" y="1143000"/>
+            <a:ext cx="8128000" cy="4572000"/>
+          </a:xfrm>
+          <a:prstGeom prst="rect">
+            <a:avLst/>
+          </a:prstGeom>
+        </p:spPr>
+      </p:pic>
+      <p:sp>
+        <p:nvSpPr>
+          <p:cNvPr id="4" name="TextBox 3"/>
           <p:cNvSpPr txBox="1"/>
           <p:nvPr/>
         </p:nvSpPr>
         <p:spPr>
           <a:xfrm>
-            <a:off x="548640" y="1234440"/>
-            <a:ext cx="11064240" cy="4937760"/>
+            <a:off x="548640" y="5897880"/>
+            <a:ext cx="11064240" cy="411480"/>
           </a:xfrm>
           <a:prstGeom prst="rect">
             <a:avLst/>
@@ -4896,101 +5581,22 @@
               <a:lnSpc>
                 <a:spcPts val="2200"/>
               </a:lnSpc>
-              <a:spcAft>
-                <a:spcPts val="1000"/>
-              </a:spcAft>
-              <a:defRPr sz="2000" b="0">
-                <a:solidFill>
-                  <a:srgbClr val="333333"/>
-                </a:solidFill>
-                <a:latin typeface="Calibri"/>
-              </a:defRPr>
-            </a:pPr>
-            <a:r>
-              <a:t>• SpiTransaction = one byte; SpiSequence = directed</a:t>
-            </a:r>
-          </a:p>
-          <a:p>
-            <a:pPr>
-              <a:lnSpc>
-                <a:spcPts val="2200"/>
-              </a:lnSpc>
-              <a:spcAft>
-                <a:spcPts val="1000"/>
-              </a:spcAft>
-              <a:defRPr sz="2000" b="0">
-                <a:solidFill>
-                  <a:srgbClr val="333333"/>
-                </a:solidFill>
-                <a:latin typeface="Calibri"/>
-              </a:defRPr>
-            </a:pPr>
-            <a:r>
-              <a:t>      list; SpiDriver waits on `done`.</a:t>
-            </a:r>
-          </a:p>
-          <a:p>
-            <a:pPr>
-              <a:lnSpc>
-                <a:spcPts val="2200"/>
-              </a:lnSpc>
-              <a:spcAft>
-                <a:spcPts val="1000"/>
-              </a:spcAft>
-              <a:defRPr sz="2000" b="0">
-                <a:solidFill>
-                  <a:srgbClr val="333333"/>
-                </a:solidFill>
-                <a:latin typeface="Calibri"/>
-              </a:defRPr>
-            </a:pPr>
-            <a:r>
-              <a:t>• SpiMonitor samples MOSI on rising SCLK while `cs_n`</a:t>
-            </a:r>
-          </a:p>
-          <a:p>
-            <a:pPr>
-              <a:lnSpc>
-                <a:spcPts val="2200"/>
-              </a:lnSpc>
-              <a:spcAft>
-                <a:spcPts val="1000"/>
-              </a:spcAft>
-              <a:defRPr sz="2000" b="0">
-                <a:solidFill>
-                  <a:srgbClr val="333333"/>
-                </a:solidFill>
-                <a:latin typeface="Calibri"/>
-              </a:defRPr>
-            </a:pPr>
-            <a:r>
-              <a:t>      is low (Mode 0, MSB first).</a:t>
-            </a:r>
-          </a:p>
-          <a:p>
-            <a:pPr>
-              <a:lnSpc>
-                <a:spcPts val="2200"/>
-              </a:lnSpc>
-              <a:spcAft>
-                <a:spcPts val="1000"/>
-              </a:spcAft>
-              <a:defRPr sz="2000" b="0">
-                <a:solidFill>
-                  <a:srgbClr val="333333"/>
-                </a:solidFill>
-                <a:latin typeface="Calibri"/>
-              </a:defRPr>
-            </a:pPr>
-            <a:r>
-              <a:t>• SpiScoreboard compares expected vs `observed_mosi`.</a:t>
-            </a:r>
-          </a:p>
-        </p:txBody>
-      </p:sp>
-      <p:sp>
-        <p:nvSpPr>
-          <p:cNvPr id="4" name="TextBox 3"/>
+              <a:defRPr sz="1200" b="0">
+                <a:solidFill>
+                  <a:srgbClr val="333333"/>
+                </a:solidFill>
+                <a:latin typeface="Calibri"/>
+              </a:defRPr>
+            </a:pPr>
+            <a:r>
+              <a:t>Module 6: DUT hierarchy and signal flow.</a:t>
+            </a:r>
+          </a:p>
+        </p:txBody>
+      </p:sp>
+      <p:sp>
+        <p:nvSpPr>
+          <p:cNvPr id="5" name="TextBox 4"/>
           <p:cNvSpPr txBox="1"/>
           <p:nvPr/>
         </p:nvSpPr>
@@ -5079,21 +5685,45 @@
               </a:defRPr>
             </a:pPr>
             <a:r>
-              <a:t>3. Bus vs DUT checking</a:t>
-            </a:r>
-          </a:p>
-        </p:txBody>
-      </p:sp>
-      <p:sp>
-        <p:nvSpPr>
-          <p:cNvPr id="3" name="TextBox 2"/>
+              <a:t>Verification / testbench diagram (reference)</a:t>
+            </a:r>
+          </a:p>
+        </p:txBody>
+      </p:sp>
+      <p:pic>
+        <p:nvPicPr>
+          <p:cNvPr id="3" name="Picture 2" descr="verification_architecture.png"/>
+          <p:cNvPicPr>
+            <a:picLocks noChangeAspect="1"/>
+          </p:cNvPicPr>
+          <p:nvPr/>
+        </p:nvPicPr>
+        <p:blipFill>
+          <a:blip r:embed="rId2"/>
+          <a:stretch>
+            <a:fillRect/>
+          </a:stretch>
+        </p:blipFill>
+        <p:spPr>
+          <a:xfrm>
+            <a:off x="548640" y="1143000"/>
+            <a:ext cx="8128000" cy="4572000"/>
+          </a:xfrm>
+          <a:prstGeom prst="rect">
+            <a:avLst/>
+          </a:prstGeom>
+        </p:spPr>
+      </p:pic>
+      <p:sp>
+        <p:nvSpPr>
+          <p:cNvPr id="4" name="TextBox 3"/>
           <p:cNvSpPr txBox="1"/>
           <p:nvPr/>
         </p:nvSpPr>
         <p:spPr>
           <a:xfrm>
-            <a:off x="548640" y="1234440"/>
-            <a:ext cx="11064240" cy="4937760"/>
+            <a:off x="548640" y="5897880"/>
+            <a:ext cx="11064240" cy="411480"/>
           </a:xfrm>
           <a:prstGeom prst="rect">
             <a:avLst/>
@@ -5110,44 +5740,22 @@
               <a:lnSpc>
                 <a:spcPts val="2200"/>
               </a:lnSpc>
-              <a:spcAft>
-                <a:spcPts val="1000"/>
-              </a:spcAft>
-              <a:defRPr sz="2000" b="0">
-                <a:solidFill>
-                  <a:srgbClr val="333333"/>
-                </a:solidFill>
-                <a:latin typeface="Calibri"/>
-              </a:defRPr>
-            </a:pPr>
-            <a:r>
-              <a:t>• Monitor validates wire behavior; `done` alone is not</a:t>
-            </a:r>
-          </a:p>
-          <a:p>
-            <a:pPr>
-              <a:lnSpc>
-                <a:spcPts val="2200"/>
-              </a:lnSpc>
-              <a:spcAft>
-                <a:spcPts val="1000"/>
-              </a:spcAft>
-              <a:defRPr sz="2000" b="0">
-                <a:solidFill>
-                  <a:srgbClr val="333333"/>
-                </a:solidFill>
-                <a:latin typeface="Calibri"/>
-              </a:defRPr>
-            </a:pPr>
-            <a:r>
-              <a:t>      sufficient for sign-off.</a:t>
-            </a:r>
-          </a:p>
-        </p:txBody>
-      </p:sp>
-      <p:sp>
-        <p:nvSpPr>
-          <p:cNvPr id="4" name="TextBox 3"/>
+              <a:defRPr sz="1200" b="0">
+                <a:solidFill>
+                  <a:srgbClr val="333333"/>
+                </a:solidFill>
+                <a:latin typeface="Calibri"/>
+              </a:defRPr>
+            </a:pPr>
+            <a:r>
+              <a:t>Module 6: stimulus, observation, and checking.</a:t>
+            </a:r>
+          </a:p>
+        </p:txBody>
+      </p:sp>
+      <p:sp>
+        <p:nvSpPr>
+          <p:cNvPr id="5" name="TextBox 4"/>
           <p:cNvSpPr txBox="1"/>
           <p:nvPr/>
         </p:nvSpPr>
@@ -5210,8 +5818,8 @@
         </p:nvSpPr>
         <p:spPr>
           <a:xfrm>
-            <a:off x="548640" y="2743200"/>
-            <a:ext cx="11064240" cy="1371600"/>
+            <a:off x="548640" y="411480"/>
+            <a:ext cx="11064240" cy="777240"/>
           </a:xfrm>
           <a:prstGeom prst="rect">
             <a:avLst/>
@@ -5224,11 +5832,11 @@
           </a:bodyPr>
           <a:lstStyle/>
           <a:p>
-            <a:pPr algn="ctr">
-              <a:lnSpc>
-                <a:spcPts val="2200"/>
-              </a:lnSpc>
-              <a:defRPr sz="3600" b="1">
+            <a:pPr>
+              <a:lnSpc>
+                <a:spcPts val="2200"/>
+              </a:lnSpc>
+              <a:defRPr sz="2800" b="1">
                 <a:solidFill>
                   <a:srgbClr val="1A1A2E"/>
                 </a:solidFill>
@@ -5236,7 +5844,7 @@
               </a:defRPr>
             </a:pPr>
             <a:r>
-              <a:t>Verification &amp; testing methods</a:t>
+              <a:t>SpiTransaction &amp; agent</a:t>
             </a:r>
           </a:p>
         </p:txBody>
@@ -5244,6 +5852,364 @@
       <p:sp>
         <p:nvSpPr>
           <p:cNvPr id="3" name="TextBox 2"/>
+          <p:cNvSpPr txBox="1"/>
+          <p:nvPr/>
+        </p:nvSpPr>
+        <p:spPr>
+          <a:xfrm>
+            <a:off x="548640" y="1143000"/>
+            <a:ext cx="11064240" cy="5029200"/>
+          </a:xfrm>
+          <a:prstGeom prst="rect">
+            <a:avLst/>
+          </a:prstGeom>
+          <a:solidFill>
+            <a:srgbClr val="F4F4F4"/>
+          </a:solidFill>
+        </p:spPr>
+        <p:txBody>
+          <a:bodyPr wrap="square">
+            <a:noAutofit/>
+          </a:bodyPr>
+          <a:lstStyle/>
+          <a:p>
+            <a:pPr>
+              <a:lnSpc>
+                <a:spcPts val="2200"/>
+              </a:lnSpc>
+              <a:spcAft>
+                <a:spcPts val="400"/>
+              </a:spcAft>
+              <a:defRPr sz="2000" b="0">
+                <a:solidFill>
+                  <a:srgbClr val="333333"/>
+                </a:solidFill>
+                <a:latin typeface="Consolas"/>
+              </a:defRPr>
+            </a:pPr>
+            <a:r>
+              <a:t>/**</a:t>
+            </a:r>
+          </a:p>
+          <a:p>
+            <a:pPr>
+              <a:lnSpc>
+                <a:spcPts val="2200"/>
+              </a:lnSpc>
+              <a:spcAft>
+                <a:spcPts val="400"/>
+              </a:spcAft>
+              <a:defRPr sz="2000" b="0">
+                <a:solidFill>
+                  <a:srgbClr val="333333"/>
+                </a:solidFill>
+                <a:latin typeface="Consolas"/>
+              </a:defRPr>
+            </a:pPr>
+            <a:r>
+              <a:t> * Module 6: SPI master UVM test (Verilator)</a:t>
+            </a:r>
+          </a:p>
+          <a:p>
+            <a:pPr>
+              <a:lnSpc>
+                <a:spcPts val="2200"/>
+              </a:lnSpc>
+              <a:spcAft>
+                <a:spcPts val="400"/>
+              </a:spcAft>
+              <a:defRPr sz="2000" b="0">
+                <a:solidFill>
+                  <a:srgbClr val="333333"/>
+                </a:solidFill>
+                <a:latin typeface="Consolas"/>
+              </a:defRPr>
+            </a:pPr>
+            <a:r>
+              <a:t> *</a:t>
+            </a:r>
+          </a:p>
+          <a:p>
+            <a:pPr>
+              <a:lnSpc>
+                <a:spcPts val="2200"/>
+              </a:lnSpc>
+              <a:spcAft>
+                <a:spcPts val="400"/>
+              </a:spcAft>
+              <a:defRPr sz="2000" b="0">
+                <a:solidFill>
+                  <a:srgbClr val="333333"/>
+                </a:solidFill>
+                <a:latin typeface="Consolas"/>
+              </a:defRPr>
+            </a:pPr>
+            <a:r>
+              <a:t> * SPI agent: transaction, sequence, driver, monitor, scoreboard.</a:t>
+            </a:r>
+          </a:p>
+          <a:p>
+            <a:pPr>
+              <a:lnSpc>
+                <a:spcPts val="2200"/>
+              </a:lnSpc>
+              <a:spcAft>
+                <a:spcPts val="400"/>
+              </a:spcAft>
+              <a:defRPr sz="2000" b="0">
+                <a:solidFill>
+                  <a:srgbClr val="333333"/>
+                </a:solidFill>
+                <a:latin typeface="Consolas"/>
+              </a:defRPr>
+            </a:pPr>
+            <a:r>
+              <a:t> * Driver sends bytes via start/data_in; monitor samples MOSI on SCLK</a:t>
+            </a:r>
+          </a:p>
+          <a:p>
+            <a:pPr>
+              <a:lnSpc>
+                <a:spcPts val="2200"/>
+              </a:lnSpc>
+              <a:spcAft>
+                <a:spcPts val="400"/>
+              </a:spcAft>
+              <a:defRPr sz="2000" b="0">
+                <a:solidFill>
+                  <a:srgbClr val="333333"/>
+                </a:solidFill>
+                <a:latin typeface="Consolas"/>
+              </a:defRPr>
+            </a:pPr>
+            <a:r>
+              <a:t>(mode 0);</a:t>
+            </a:r>
+          </a:p>
+          <a:p>
+            <a:pPr>
+              <a:lnSpc>
+                <a:spcPts val="2200"/>
+              </a:lnSpc>
+              <a:spcAft>
+                <a:spcPts val="400"/>
+              </a:spcAft>
+              <a:defRPr sz="2000" b="0">
+                <a:solidFill>
+                  <a:srgbClr val="333333"/>
+                </a:solidFill>
+                <a:latin typeface="Consolas"/>
+              </a:defRPr>
+            </a:pPr>
+            <a:r>
+              <a:t> * scoreboard checks expected vs observed.</a:t>
+            </a:r>
+          </a:p>
+          <a:p>
+            <a:pPr>
+              <a:lnSpc>
+                <a:spcPts val="2200"/>
+              </a:lnSpc>
+              <a:spcAft>
+                <a:spcPts val="400"/>
+              </a:spcAft>
+              <a:defRPr sz="2000" b="0">
+                <a:solidFill>
+                  <a:srgbClr val="333333"/>
+                </a:solidFill>
+                <a:latin typeface="Consolas"/>
+              </a:defRPr>
+            </a:pPr>
+            <a:r>
+              <a:t> */</a:t>
+            </a:r>
+          </a:p>
+          <a:p>
+            <a:pPr>
+              <a:lnSpc>
+                <a:spcPts val="2200"/>
+              </a:lnSpc>
+              <a:spcAft>
+                <a:spcPts val="400"/>
+              </a:spcAft>
+              <a:defRPr sz="2000" b="0">
+                <a:solidFill>
+                  <a:srgbClr val="333333"/>
+                </a:solidFill>
+                <a:latin typeface="Consolas"/>
+              </a:defRPr>
+            </a:pPr>
+          </a:p>
+          <a:p>
+            <a:pPr>
+              <a:lnSpc>
+                <a:spcPts val="2200"/>
+              </a:lnSpc>
+              <a:spcAft>
+                <a:spcPts val="400"/>
+              </a:spcAft>
+              <a:defRPr sz="2000" b="0">
+                <a:solidFill>
+                  <a:srgbClr val="333333"/>
+                </a:solidFill>
+                <a:latin typeface="Consolas"/>
+              </a:defRPr>
+            </a:pPr>
+            <a:r>
+              <a:t>`include "uvm_macros.svh"</a:t>
+            </a:r>
+          </a:p>
+          <a:p>
+            <a:pPr>
+              <a:lnSpc>
+                <a:spcPts val="2200"/>
+              </a:lnSpc>
+              <a:spcAft>
+                <a:spcPts val="400"/>
+              </a:spcAft>
+              <a:defRPr sz="2000" b="0">
+                <a:solidFill>
+                  <a:srgbClr val="333333"/>
+                </a:solidFill>
+                <a:latin typeface="Consolas"/>
+              </a:defRPr>
+            </a:pPr>
+            <a:r>
+              <a:t>import uvm_pkg::*;</a:t>
+            </a:r>
+          </a:p>
+          <a:p>
+            <a:pPr>
+              <a:lnSpc>
+                <a:spcPts val="2200"/>
+              </a:lnSpc>
+              <a:spcAft>
+                <a:spcPts val="400"/>
+              </a:spcAft>
+              <a:defRPr sz="2000" b="0">
+                <a:solidFill>
+                  <a:srgbClr val="333333"/>
+                </a:solidFill>
+                <a:latin typeface="Consolas"/>
+              </a:defRPr>
+            </a:pPr>
+          </a:p>
+          <a:p>
+            <a:pPr>
+              <a:lnSpc>
+                <a:spcPts val="2200"/>
+              </a:lnSpc>
+              <a:spcAft>
+                <a:spcPts val="400"/>
+              </a:spcAft>
+              <a:defRPr sz="2000" b="0">
+                <a:solidFill>
+                  <a:srgbClr val="333333"/>
+                </a:solidFill>
+                <a:latin typeface="Consolas"/>
+              </a:defRPr>
+            </a:pPr>
+            <a:r>
+              <a:t>`timescale 1ns/1ps</a:t>
+            </a:r>
+          </a:p>
+          <a:p>
+            <a:pPr>
+              <a:lnSpc>
+                <a:spcPts val="2200"/>
+              </a:lnSpc>
+              <a:spcAft>
+                <a:spcPts val="400"/>
+              </a:spcAft>
+              <a:defRPr sz="2000" b="0">
+                <a:solidFill>
+                  <a:srgbClr val="333333"/>
+                </a:solidFill>
+                <a:latin typeface="Consolas"/>
+              </a:defRPr>
+            </a:pPr>
+          </a:p>
+          <a:p>
+            <a:pPr>
+              <a:lnSpc>
+                <a:spcPts val="2200"/>
+              </a:lnSpc>
+              <a:spcAft>
+                <a:spcPts val="400"/>
+              </a:spcAft>
+              <a:defRPr sz="2000" b="0">
+                <a:solidFill>
+                  <a:srgbClr val="333333"/>
+                </a:solidFill>
+                <a:latin typeface="Consolas"/>
+              </a:defRPr>
+            </a:pPr>
+            <a:r>
+              <a:t>// ---------------------------------------------------------------------</a:t>
+            </a:r>
+          </a:p>
+          <a:p>
+            <a:pPr>
+              <a:lnSpc>
+                <a:spcPts val="2200"/>
+              </a:lnSpc>
+              <a:spcAft>
+                <a:spcPts val="400"/>
+              </a:spcAft>
+              <a:defRPr sz="2000" b="0">
+                <a:solidFill>
+                  <a:srgbClr val="333333"/>
+                </a:solidFill>
+                <a:latin typeface="Consolas"/>
+              </a:defRPr>
+            </a:pPr>
+            <a:r>
+              <a:t>--------</a:t>
+            </a:r>
+          </a:p>
+          <a:p>
+            <a:pPr>
+              <a:lnSpc>
+                <a:spcPts val="2200"/>
+              </a:lnSpc>
+              <a:spcAft>
+                <a:spcPts val="400"/>
+              </a:spcAft>
+              <a:defRPr sz="2000" b="0">
+                <a:solidFill>
+                  <a:srgbClr val="333333"/>
+                </a:solidFill>
+                <a:latin typeface="Consolas"/>
+              </a:defRPr>
+            </a:pPr>
+            <a:r>
+              <a:t>// Interface</a:t>
+            </a:r>
+          </a:p>
+          <a:p>
+            <a:pPr>
+              <a:lnSpc>
+                <a:spcPts val="2200"/>
+              </a:lnSpc>
+              <a:spcAft>
+                <a:spcPts val="400"/>
+              </a:spcAft>
+              <a:defRPr sz="2000" b="0">
+                <a:solidFill>
+                  <a:srgbClr val="333333"/>
+                </a:solidFill>
+                <a:latin typeface="Consolas"/>
+              </a:defRPr>
+            </a:pPr>
+            <a:r>
+              <a:t>// ---------------------------------------------------------------------</a:t>
+            </a:r>
+          </a:p>
+        </p:txBody>
+      </p:sp>
+      <p:sp>
+        <p:nvSpPr>
+          <p:cNvPr id="4" name="TextBox 3"/>
           <p:cNvSpPr txBox="1"/>
           <p:nvPr/>
         </p:nvSpPr>
@@ -5306,8 +6272,8 @@
         </p:nvSpPr>
         <p:spPr>
           <a:xfrm>
-            <a:off x="548640" y="411480"/>
-            <a:ext cx="11064240" cy="777240"/>
+            <a:off x="548640" y="2743200"/>
+            <a:ext cx="11064240" cy="1371600"/>
           </a:xfrm>
           <a:prstGeom prst="rect">
             <a:avLst/>
@@ -5320,11 +6286,11 @@
           </a:bodyPr>
           <a:lstStyle/>
           <a:p>
-            <a:pPr>
-              <a:lnSpc>
-                <a:spcPts val="2200"/>
-              </a:lnSpc>
-              <a:defRPr sz="2800" b="1">
+            <a:pPr algn="ctr">
+              <a:lnSpc>
+                <a:spcPts val="2200"/>
+              </a:lnSpc>
+              <a:defRPr sz="3600" b="1">
                 <a:solidFill>
                   <a:srgbClr val="1A1A2E"/>
                 </a:solidFill>
@@ -5332,77 +6298,14 @@
               </a:defRPr>
             </a:pPr>
             <a:r>
-              <a:t>Testing and closure flow</a:t>
-            </a:r>
-          </a:p>
-        </p:txBody>
-      </p:sp>
-      <p:pic>
-        <p:nvPicPr>
-          <p:cNvPr id="3" name="Picture 2" descr="testing_methods.png"/>
-          <p:cNvPicPr>
-            <a:picLocks noChangeAspect="1"/>
-          </p:cNvPicPr>
-          <p:nvPr/>
-        </p:nvPicPr>
-        <p:blipFill>
-          <a:blip r:embed="rId2"/>
-          <a:stretch>
-            <a:fillRect/>
-          </a:stretch>
-        </p:blipFill>
-        <p:spPr>
-          <a:xfrm>
-            <a:off x="548640" y="1143000"/>
-            <a:ext cx="8128000" cy="4572000"/>
-          </a:xfrm>
-          <a:prstGeom prst="rect">
-            <a:avLst/>
-          </a:prstGeom>
-        </p:spPr>
-      </p:pic>
-      <p:sp>
-        <p:nvSpPr>
-          <p:cNvPr id="4" name="TextBox 3"/>
-          <p:cNvSpPr txBox="1"/>
-          <p:nvPr/>
-        </p:nvSpPr>
-        <p:spPr>
-          <a:xfrm>
-            <a:off x="548640" y="5897880"/>
-            <a:ext cx="11064240" cy="411480"/>
-          </a:xfrm>
-          <a:prstGeom prst="rect">
-            <a:avLst/>
-          </a:prstGeom>
-          <a:noFill/>
-        </p:spPr>
-        <p:txBody>
-          <a:bodyPr wrap="square">
-            <a:noAutofit/>
-          </a:bodyPr>
-          <a:lstStyle/>
-          <a:p>
-            <a:pPr>
-              <a:lnSpc>
-                <a:spcPts val="2200"/>
-              </a:lnSpc>
-              <a:defRPr sz="1200" b="0">
-                <a:solidFill>
-                  <a:srgbClr val="333333"/>
-                </a:solidFill>
-                <a:latin typeface="Calibri"/>
-              </a:defRPr>
-            </a:pPr>
-            <a:r>
-              <a:t>Module 6: how tests, checks, and metrics close verification goals.</a:t>
-            </a:r>
-          </a:p>
-        </p:txBody>
-      </p:sp>
-      <p:sp>
-        <p:nvSpPr>
-          <p:cNvPr id="5" name="TextBox 4"/>
+              <a:t>Execution &amp; simulation flow</a:t>
+            </a:r>
+          </a:p>
+        </p:txBody>
+      </p:sp>
+      <p:sp>
+        <p:nvSpPr>
+          <p:cNvPr id="3" name="TextBox 2"/>
           <p:cNvSpPr txBox="1"/>
           <p:nvPr/>
         </p:nvSpPr>
@@ -5491,7 +6394,7 @@
               </a:defRPr>
             </a:pPr>
             <a:r>
-              <a:t>1. Mode 0 in the testbench</a:t>
+              <a:t>How the example runs (toolchain)</a:t>
             </a:r>
           </a:p>
         </p:txBody>
@@ -5533,7 +6436,7 @@
               </a:defRPr>
             </a:pPr>
             <a:r>
-              <a:t>• Monitor must use rising-edge capture and falling-</a:t>
+              <a:t>• Makefile: Verilator + UVM_HOME compile RTL,</a:t>
             </a:r>
           </a:p>
           <a:p>
@@ -5552,7 +6455,159 @@
               </a:defRPr>
             </a:pPr>
             <a:r>
-              <a:t>      edge change — matches CPOL/CPHA=0.</a:t>
+              <a:t>      interface, and test_*.sv</a:t>
+            </a:r>
+          </a:p>
+          <a:p>
+            <a:pPr>
+              <a:lnSpc>
+                <a:spcPts val="2200"/>
+              </a:lnSpc>
+              <a:spcAft>
+                <a:spcPts val="1000"/>
+              </a:spcAft>
+              <a:defRPr sz="2000" b="0">
+                <a:solidFill>
+                  <a:srgbClr val="333333"/>
+                </a:solidFill>
+                <a:latin typeface="Calibri"/>
+              </a:defRPr>
+            </a:pPr>
+            <a:r>
+              <a:t>• UVM phases: build → connect → run_test → report</a:t>
+            </a:r>
+          </a:p>
+          <a:p>
+            <a:pPr>
+              <a:lnSpc>
+                <a:spcPts val="2200"/>
+              </a:lnSpc>
+              <a:spcAft>
+                <a:spcPts val="1000"/>
+              </a:spcAft>
+              <a:defRPr sz="2000" b="0">
+                <a:solidFill>
+                  <a:srgbClr val="333333"/>
+                </a:solidFill>
+                <a:latin typeface="Calibri"/>
+              </a:defRPr>
+            </a:pPr>
+            <a:r>
+              <a:t>      (same pattern as Module 2)</a:t>
+            </a:r>
+          </a:p>
+          <a:p>
+            <a:pPr>
+              <a:lnSpc>
+                <a:spcPts val="2200"/>
+              </a:lnSpc>
+              <a:spcAft>
+                <a:spcPts val="1000"/>
+              </a:spcAft>
+              <a:defRPr sz="2000" b="0">
+                <a:solidFill>
+                  <a:srgbClr val="333333"/>
+                </a:solidFill>
+                <a:latin typeface="Calibri"/>
+              </a:defRPr>
+            </a:pPr>
+            <a:r>
+              <a:t>• Sequence → driver → DUT → monitor → scoreboard (read</a:t>
+            </a:r>
+          </a:p>
+          <a:p>
+            <a:pPr>
+              <a:lnSpc>
+                <a:spcPts val="2200"/>
+              </a:lnSpc>
+              <a:spcAft>
+                <a:spcPts val="1000"/>
+              </a:spcAft>
+              <a:defRPr sz="2000" b="0">
+                <a:solidFill>
+                  <a:srgbClr val="333333"/>
+                </a:solidFill>
+                <a:latin typeface="Calibri"/>
+              </a:defRPr>
+            </a:pPr>
+            <a:r>
+              <a:t>      SCOREBOARD at end)</a:t>
+            </a:r>
+          </a:p>
+          <a:p>
+            <a:pPr>
+              <a:lnSpc>
+                <a:spcPts val="2200"/>
+              </a:lnSpc>
+              <a:spcAft>
+                <a:spcPts val="1000"/>
+              </a:spcAft>
+              <a:defRPr sz="2000" b="0">
+                <a:solidFill>
+                  <a:srgbClr val="333333"/>
+                </a:solidFill>
+                <a:latin typeface="Calibri"/>
+              </a:defRPr>
+            </a:pPr>
+            <a:r>
+              <a:t>• Typical command: make SIM=verilator TEST=test_* (see</a:t>
+            </a:r>
+          </a:p>
+          <a:p>
+            <a:pPr>
+              <a:lnSpc>
+                <a:spcPts val="2200"/>
+              </a:lnSpc>
+              <a:spcAft>
+                <a:spcPts val="1000"/>
+              </a:spcAft>
+              <a:defRPr sz="2000" b="0">
+                <a:solidFill>
+                  <a:srgbClr val="333333"/>
+                </a:solidFill>
+                <a:latin typeface="Calibri"/>
+              </a:defRPr>
+            </a:pPr>
+            <a:r>
+              <a:t>      module6 demo slide)</a:t>
+            </a:r>
+          </a:p>
+          <a:p>
+            <a:pPr>
+              <a:lnSpc>
+                <a:spcPts val="2200"/>
+              </a:lnSpc>
+              <a:spcAft>
+                <a:spcPts val="1000"/>
+              </a:spcAft>
+              <a:defRPr sz="2000" b="0">
+                <a:solidFill>
+                  <a:srgbClr val="333333"/>
+                </a:solidFill>
+                <a:latin typeface="Calibri"/>
+              </a:defRPr>
+            </a:pPr>
+            <a:r>
+              <a:t>• Loopback / hooks connect monitor observations to</a:t>
+            </a:r>
+          </a:p>
+          <a:p>
+            <a:pPr>
+              <a:lnSpc>
+                <a:spcPts val="2200"/>
+              </a:lnSpc>
+              <a:spcAft>
+                <a:spcPts val="1000"/>
+              </a:spcAft>
+              <a:defRPr sz="2000" b="0">
+                <a:solidFill>
+                  <a:srgbClr val="333333"/>
+                </a:solidFill>
+                <a:latin typeface="Calibri"/>
+              </a:defRPr>
+            </a:pPr>
+            <a:r>
+              <a:t>      scoreboard checks</a:t>
             </a:r>
           </a:p>
         </p:txBody>
@@ -5648,7 +6703,7 @@
               </a:defRPr>
             </a:pPr>
             <a:r>
-              <a:t>2. Directed regression</a:t>
+              <a:t>Example directory layout</a:t>
             </a:r>
           </a:p>
         </p:txBody>
@@ -5690,7 +6745,7 @@
               </a:defRPr>
             </a:pPr>
             <a:r>
-              <a:t>• Same byte pattern as UART UVM (0x00 … 0xFF) for</a:t>
+              <a:t>• dut/: spi_master.v, clk_div.v (same as Module 5)</a:t>
             </a:r>
           </a:p>
           <a:p>
@@ -5709,7 +6764,45 @@
               </a:defRPr>
             </a:pPr>
             <a:r>
-              <a:t>      apples-to-apples learning.</a:t>
+              <a:t>• test_spi_uvm.sv: Interface, SpiTransaction,</a:t>
+            </a:r>
+          </a:p>
+          <a:p>
+            <a:pPr>
+              <a:lnSpc>
+                <a:spcPts val="2200"/>
+              </a:lnSpc>
+              <a:spcAft>
+                <a:spcPts val="1000"/>
+              </a:spcAft>
+              <a:defRPr sz="2000" b="0">
+                <a:solidFill>
+                  <a:srgbClr val="333333"/>
+                </a:solidFill>
+                <a:latin typeface="Calibri"/>
+              </a:defRPr>
+            </a:pPr>
+            <a:r>
+              <a:t>      SpiSequence, SpiDriver, SpiMonitor, SpiScoreboard,</a:t>
+            </a:r>
+          </a:p>
+          <a:p>
+            <a:pPr>
+              <a:lnSpc>
+                <a:spcPts val="2200"/>
+              </a:lnSpc>
+              <a:spcAft>
+                <a:spcPts val="1000"/>
+              </a:spcAft>
+              <a:defRPr sz="2000" b="0">
+                <a:solidFill>
+                  <a:srgbClr val="333333"/>
+                </a:solidFill>
+                <a:latin typeface="Calibri"/>
+              </a:defRPr>
+            </a:pPr>
+            <a:r>
+              <a:t>      SpiA…</a:t>
             </a:r>
           </a:p>
         </p:txBody>
@@ -5805,7 +6898,7 @@
               </a:defRPr>
             </a:pPr>
             <a:r>
-              <a:t>3. Extensions</a:t>
+              <a:t>Makefile — UVM SPI sim</a:t>
             </a:r>
           </a:p>
         </p:txBody>
@@ -5818,13 +6911,15 @@
         </p:nvSpPr>
         <p:spPr>
           <a:xfrm>
-            <a:off x="548640" y="1234440"/>
-            <a:ext cx="11064240" cy="4937760"/>
-          </a:xfrm>
-          <a:prstGeom prst="rect">
-            <a:avLst/>
-          </a:prstGeom>
-          <a:noFill/>
+            <a:off x="548640" y="1143000"/>
+            <a:ext cx="11064240" cy="5029200"/>
+          </a:xfrm>
+          <a:prstGeom prst="rect">
+            <a:avLst/>
+          </a:prstGeom>
+          <a:solidFill>
+            <a:srgbClr val="F4F4F4"/>
+          </a:solidFill>
         </p:spPr>
         <p:txBody>
           <a:bodyPr wrap="square">
@@ -5837,55 +6932,331 @@
                 <a:spcPts val="2200"/>
               </a:lnSpc>
               <a:spcAft>
-                <a:spcPts val="1000"/>
-              </a:spcAft>
-              <a:defRPr sz="2000" b="0">
-                <a:solidFill>
-                  <a:srgbClr val="333333"/>
-                </a:solidFill>
-                <a:latin typeface="Calibri"/>
-              </a:defRPr>
-            </a:pPr>
-            <a:r>
-              <a:t>• MISO reads, random data, mode parameters — see</a:t>
-            </a:r>
-          </a:p>
-          <a:p>
-            <a:pPr>
-              <a:lnSpc>
-                <a:spcPts val="2200"/>
-              </a:lnSpc>
-              <a:spcAft>
-                <a:spcPts val="1000"/>
-              </a:spcAft>
-              <a:defRPr sz="2000" b="0">
-                <a:solidFill>
-                  <a:srgbClr val="333333"/>
-                </a:solidFill>
-                <a:latin typeface="Calibri"/>
-              </a:defRPr>
-            </a:pPr>
-            <a:r>
-              <a:t>      [LEARNING_GUIDE §</a:t>
-            </a:r>
-          </a:p>
-          <a:p>
-            <a:pPr>
-              <a:lnSpc>
-                <a:spcPts val="2200"/>
-              </a:lnSpc>
-              <a:spcAft>
-                <a:spcPts val="1000"/>
-              </a:spcAft>
-              <a:defRPr sz="2000" b="0">
-                <a:solidFill>
-                  <a:srgbClr val="333333"/>
-                </a:solidFill>
-                <a:latin typeface="Calibri"/>
-              </a:defRPr>
-            </a:pPr>
-            <a:r>
-              <a:t>      7](LEARNING_GUIDE_PROTOCOLS_AND_UV…</a:t>
+                <a:spcPts val="400"/>
+              </a:spcAft>
+              <a:defRPr sz="2000" b="0">
+                <a:solidFill>
+                  <a:srgbClr val="333333"/>
+                </a:solidFill>
+                <a:latin typeface="Consolas"/>
+              </a:defRPr>
+            </a:pPr>
+            <a:r>
+              <a:t># Makefile for Module 6 SPI UVM test</a:t>
+            </a:r>
+          </a:p>
+          <a:p>
+            <a:pPr>
+              <a:lnSpc>
+                <a:spcPts val="2200"/>
+              </a:lnSpc>
+              <a:spcAft>
+                <a:spcPts val="400"/>
+              </a:spcAft>
+              <a:defRPr sz="2000" b="0">
+                <a:solidFill>
+                  <a:srgbClr val="333333"/>
+                </a:solidFill>
+                <a:latin typeface="Consolas"/>
+              </a:defRPr>
+            </a:pPr>
+            <a:r>
+              <a:t>#</a:t>
+            </a:r>
+          </a:p>
+          <a:p>
+            <a:pPr>
+              <a:lnSpc>
+                <a:spcPts val="2200"/>
+              </a:lnSpc>
+              <a:spcAft>
+                <a:spcPts val="400"/>
+              </a:spcAft>
+              <a:defRPr sz="2000" b="0">
+                <a:solidFill>
+                  <a:srgbClr val="333333"/>
+                </a:solidFill>
+                <a:latin typeface="Consolas"/>
+              </a:defRPr>
+            </a:pPr>
+            <a:r>
+              <a:t># Usage:</a:t>
+            </a:r>
+          </a:p>
+          <a:p>
+            <a:pPr>
+              <a:lnSpc>
+                <a:spcPts val="2200"/>
+              </a:lnSpc>
+              <a:spcAft>
+                <a:spcPts val="400"/>
+              </a:spcAft>
+              <a:defRPr sz="2000" b="0">
+                <a:solidFill>
+                  <a:srgbClr val="333333"/>
+                </a:solidFill>
+                <a:latin typeface="Consolas"/>
+              </a:defRPr>
+            </a:pPr>
+            <a:r>
+              <a:t>#   make SIM=verilator TEST=test_spi_uvm</a:t>
+            </a:r>
+          </a:p>
+          <a:p>
+            <a:pPr>
+              <a:lnSpc>
+                <a:spcPts val="2200"/>
+              </a:lnSpc>
+              <a:spcAft>
+                <a:spcPts val="400"/>
+              </a:spcAft>
+              <a:defRPr sz="2000" b="0">
+                <a:solidFill>
+                  <a:srgbClr val="333333"/>
+                </a:solidFill>
+                <a:latin typeface="Consolas"/>
+              </a:defRPr>
+            </a:pPr>
+            <a:r>
+              <a:t>#</a:t>
+            </a:r>
+          </a:p>
+          <a:p>
+            <a:pPr>
+              <a:lnSpc>
+                <a:spcPts val="2200"/>
+              </a:lnSpc>
+              <a:spcAft>
+                <a:spcPts val="400"/>
+              </a:spcAft>
+              <a:defRPr sz="2000" b="0">
+                <a:solidFill>
+                  <a:srgbClr val="333333"/>
+                </a:solidFill>
+                <a:latin typeface="Consolas"/>
+              </a:defRPr>
+            </a:pPr>
+          </a:p>
+          <a:p>
+            <a:pPr>
+              <a:lnSpc>
+                <a:spcPts val="2200"/>
+              </a:lnSpc>
+              <a:spcAft>
+                <a:spcPts val="400"/>
+              </a:spcAft>
+              <a:defRPr sz="2000" b="0">
+                <a:solidFill>
+                  <a:srgbClr val="333333"/>
+                </a:solidFill>
+                <a:latin typeface="Consolas"/>
+              </a:defRPr>
+            </a:pPr>
+            <a:r>
+              <a:t>SIM ?= verilator</a:t>
+            </a:r>
+          </a:p>
+          <a:p>
+            <a:pPr>
+              <a:lnSpc>
+                <a:spcPts val="2200"/>
+              </a:lnSpc>
+              <a:spcAft>
+                <a:spcPts val="400"/>
+              </a:spcAft>
+              <a:defRPr sz="2000" b="0">
+                <a:solidFill>
+                  <a:srgbClr val="333333"/>
+                </a:solidFill>
+                <a:latin typeface="Consolas"/>
+              </a:defRPr>
+            </a:pPr>
+            <a:r>
+              <a:t>TEST ?= test_spi_uvm</a:t>
+            </a:r>
+          </a:p>
+          <a:p>
+            <a:pPr>
+              <a:lnSpc>
+                <a:spcPts val="2200"/>
+              </a:lnSpc>
+              <a:spcAft>
+                <a:spcPts val="400"/>
+              </a:spcAft>
+              <a:defRPr sz="2000" b="0">
+                <a:solidFill>
+                  <a:srgbClr val="333333"/>
+                </a:solidFill>
+                <a:latin typeface="Consolas"/>
+              </a:defRPr>
+            </a:pPr>
+          </a:p>
+          <a:p>
+            <a:pPr>
+              <a:lnSpc>
+                <a:spcPts val="2200"/>
+              </a:lnSpc>
+              <a:spcAft>
+                <a:spcPts val="400"/>
+              </a:spcAft>
+              <a:defRPr sz="2000" b="0">
+                <a:solidFill>
+                  <a:srgbClr val="333333"/>
+                </a:solidFill>
+                <a:latin typeface="Consolas"/>
+              </a:defRPr>
+            </a:pPr>
+            <a:r>
+              <a:t># Prefer externally-set UVM_HOME, but fall back to vendored UVM.</a:t>
+            </a:r>
+          </a:p>
+          <a:p>
+            <a:pPr>
+              <a:lnSpc>
+                <a:spcPts val="2200"/>
+              </a:lnSpc>
+              <a:spcAft>
+                <a:spcPts val="400"/>
+              </a:spcAft>
+              <a:defRPr sz="2000" b="0">
+                <a:solidFill>
+                  <a:srgbClr val="333333"/>
+                </a:solidFill>
+                <a:latin typeface="Consolas"/>
+              </a:defRPr>
+            </a:pPr>
+            <a:r>
+              <a:t># From module6/examples/spi_uvm, repo root is ../../..</a:t>
+            </a:r>
+          </a:p>
+          <a:p>
+            <a:pPr>
+              <a:lnSpc>
+                <a:spcPts val="2200"/>
+              </a:lnSpc>
+              <a:spcAft>
+                <a:spcPts val="400"/>
+              </a:spcAft>
+              <a:defRPr sz="2000" b="0">
+                <a:solidFill>
+                  <a:srgbClr val="333333"/>
+                </a:solidFill>
+                <a:latin typeface="Consolas"/>
+              </a:defRPr>
+            </a:pPr>
+            <a:r>
+              <a:t>UVM_HOME ?= $(shell echo $$UVM_HOME)</a:t>
+            </a:r>
+          </a:p>
+          <a:p>
+            <a:pPr>
+              <a:lnSpc>
+                <a:spcPts val="2200"/>
+              </a:lnSpc>
+              <a:spcAft>
+                <a:spcPts val="400"/>
+              </a:spcAft>
+              <a:defRPr sz="2000" b="0">
+                <a:solidFill>
+                  <a:srgbClr val="333333"/>
+                </a:solidFill>
+                <a:latin typeface="Consolas"/>
+              </a:defRPr>
+            </a:pPr>
+            <a:r>
+              <a:t>UVM_HOME_FALLBACK := ../../../tools/uvm-2017/1800.2-2017-1.0</a:t>
+            </a:r>
+          </a:p>
+          <a:p>
+            <a:pPr>
+              <a:lnSpc>
+                <a:spcPts val="2200"/>
+              </a:lnSpc>
+              <a:spcAft>
+                <a:spcPts val="400"/>
+              </a:spcAft>
+              <a:defRPr sz="2000" b="0">
+                <a:solidFill>
+                  <a:srgbClr val="333333"/>
+                </a:solidFill>
+                <a:latin typeface="Consolas"/>
+              </a:defRPr>
+            </a:pPr>
+            <a:r>
+              <a:t>UVM_HOME_FALLBACK_ALT :=</a:t>
+            </a:r>
+          </a:p>
+          <a:p>
+            <a:pPr>
+              <a:lnSpc>
+                <a:spcPts val="2200"/>
+              </a:lnSpc>
+              <a:spcAft>
+                <a:spcPts val="400"/>
+              </a:spcAft>
+              <a:defRPr sz="2000" b="0">
+                <a:solidFill>
+                  <a:srgbClr val="333333"/>
+                </a:solidFill>
+                <a:latin typeface="Consolas"/>
+              </a:defRPr>
+            </a:pPr>
+            <a:r>
+              <a:t>../../../tools/learn_uvm2017_sv_verilator/tools/uvm-2017/1800.2-2017-1.0</a:t>
+            </a:r>
+          </a:p>
+          <a:p>
+            <a:pPr>
+              <a:lnSpc>
+                <a:spcPts val="2200"/>
+              </a:lnSpc>
+              <a:spcAft>
+                <a:spcPts val="400"/>
+              </a:spcAft>
+              <a:defRPr sz="2000" b="0">
+                <a:solidFill>
+                  <a:srgbClr val="333333"/>
+                </a:solidFill>
+                <a:latin typeface="Consolas"/>
+              </a:defRPr>
+            </a:pPr>
+          </a:p>
+          <a:p>
+            <a:pPr>
+              <a:lnSpc>
+                <a:spcPts val="2200"/>
+              </a:lnSpc>
+              <a:spcAft>
+                <a:spcPts val="400"/>
+              </a:spcAft>
+              <a:defRPr sz="2000" b="0">
+                <a:solidFill>
+                  <a:srgbClr val="333333"/>
+                </a:solidFill>
+                <a:latin typeface="Consolas"/>
+              </a:defRPr>
+            </a:pPr>
+            <a:r>
+              <a:t>ifeq ($(UVM_HOME),)</a:t>
+            </a:r>
+          </a:p>
+          <a:p>
+            <a:pPr>
+              <a:lnSpc>
+                <a:spcPts val="2200"/>
+              </a:lnSpc>
+              <a:spcAft>
+                <a:spcPts val="400"/>
+              </a:spcAft>
+              <a:defRPr sz="2000" b="0">
+                <a:solidFill>
+                  <a:srgbClr val="333333"/>
+                </a:solidFill>
+                <a:latin typeface="Consolas"/>
+              </a:defRPr>
+            </a:pPr>
+            <a:r>
+              <a:t># ...</a:t>
             </a:r>
           </a:p>
         </p:txBody>
@@ -5981,7 +7352,7 @@
               </a:defRPr>
             </a:pPr>
             <a:r>
-              <a:t>Syllabus topics</a:t>
+              <a:t>Key files to study</a:t>
             </a:r>
           </a:p>
         </p:txBody>
@@ -6329,7 +7700,7 @@
               </a:defRPr>
             </a:pPr>
             <a:r>
-              <a:t>1. SPI protocol recap (Mode 0)</a:t>
+              <a:t>Open these in the repo</a:t>
             </a:r>
           </a:p>
         </p:txBody>
@@ -6371,7 +7742,7 @@
               </a:defRPr>
             </a:pPr>
             <a:r>
-              <a:t>• `cs_n` frames; 8 SCLK cycles per byte; MSB first on</a:t>
+              <a:t>• `module6/examples/spi_uvm/dut/spi_master.v` — reused</a:t>
             </a:r>
           </a:p>
           <a:p>
@@ -6390,7 +7761,83 @@
               </a:defRPr>
             </a:pPr>
             <a:r>
-              <a:t>      MOSI.</a:t>
+              <a:t>      from Module 5</a:t>
+            </a:r>
+          </a:p>
+          <a:p>
+            <a:pPr>
+              <a:lnSpc>
+                <a:spcPts val="2200"/>
+              </a:lnSpc>
+              <a:spcAft>
+                <a:spcPts val="1000"/>
+              </a:spcAft>
+              <a:defRPr sz="2000" b="0">
+                <a:solidFill>
+                  <a:srgbClr val="333333"/>
+                </a:solidFill>
+                <a:latin typeface="Calibri"/>
+              </a:defRPr>
+            </a:pPr>
+            <a:r>
+              <a:t>• `module6/examples/spi_uvm/test_spi_uvm.sv` —</a:t>
+            </a:r>
+          </a:p>
+          <a:p>
+            <a:pPr>
+              <a:lnSpc>
+                <a:spcPts val="2200"/>
+              </a:lnSpc>
+              <a:spcAft>
+                <a:spcPts val="1000"/>
+              </a:spcAft>
+              <a:defRPr sz="2000" b="0">
+                <a:solidFill>
+                  <a:srgbClr val="333333"/>
+                </a:solidFill>
+                <a:latin typeface="Calibri"/>
+              </a:defRPr>
+            </a:pPr>
+            <a:r>
+              <a:t>      SpiMonitor samples MOSI on SCLK</a:t>
+            </a:r>
+          </a:p>
+          <a:p>
+            <a:pPr>
+              <a:lnSpc>
+                <a:spcPts val="2200"/>
+              </a:lnSpc>
+              <a:spcAft>
+                <a:spcPts val="1000"/>
+              </a:spcAft>
+              <a:defRPr sz="2000" b="0">
+                <a:solidFill>
+                  <a:srgbClr val="333333"/>
+                </a:solidFill>
+                <a:latin typeface="Calibri"/>
+              </a:defRPr>
+            </a:pPr>
+            <a:r>
+              <a:t>• `docs/LEARNING_GUIDE_PROTOCOLS_AND_UVM.md` — § 7 SPI</a:t>
+            </a:r>
+          </a:p>
+          <a:p>
+            <a:pPr>
+              <a:lnSpc>
+                <a:spcPts val="2200"/>
+              </a:lnSpc>
+              <a:spcAft>
+                <a:spcPts val="1000"/>
+              </a:spcAft>
+              <a:defRPr sz="2000" b="0">
+                <a:solidFill>
+                  <a:srgbClr val="333333"/>
+                </a:solidFill>
+                <a:latin typeface="Calibri"/>
+              </a:defRPr>
+            </a:pPr>
+            <a:r>
+              <a:t>      UVM mapping</a:t>
             </a:r>
           </a:p>
         </p:txBody>
@@ -6460,8 +7907,8 @@
         </p:nvSpPr>
         <p:spPr>
           <a:xfrm>
-            <a:off x="548640" y="411480"/>
-            <a:ext cx="11064240" cy="777240"/>
+            <a:off x="548640" y="2743200"/>
+            <a:ext cx="11064240" cy="1371600"/>
           </a:xfrm>
           <a:prstGeom prst="rect">
             <a:avLst/>
@@ -6474,11 +7921,11 @@
           </a:bodyPr>
           <a:lstStyle/>
           <a:p>
-            <a:pPr>
-              <a:lnSpc>
-                <a:spcPts val="2200"/>
-              </a:lnSpc>
-              <a:defRPr sz="2800" b="1">
+            <a:pPr algn="ctr">
+              <a:lnSpc>
+                <a:spcPts val="2200"/>
+              </a:lnSpc>
+              <a:defRPr sz="3600" b="1">
                 <a:solidFill>
                   <a:srgbClr val="1A1A2E"/>
                 </a:solidFill>
@@ -6486,7 +7933,7 @@
               </a:defRPr>
             </a:pPr>
             <a:r>
-              <a:t>2. Toolchain</a:t>
+              <a:t>Verification &amp; testing methods</a:t>
             </a:r>
           </a:p>
         </p:txBody>
@@ -6494,67 +7941,6 @@
       <p:sp>
         <p:nvSpPr>
           <p:cNvPr id="3" name="TextBox 2"/>
-          <p:cNvSpPr txBox="1"/>
-          <p:nvPr/>
-        </p:nvSpPr>
-        <p:spPr>
-          <a:xfrm>
-            <a:off x="548640" y="1234440"/>
-            <a:ext cx="11064240" cy="4937760"/>
-          </a:xfrm>
-          <a:prstGeom prst="rect">
-            <a:avLst/>
-          </a:prstGeom>
-          <a:noFill/>
-        </p:spPr>
-        <p:txBody>
-          <a:bodyPr wrap="square">
-            <a:noAutofit/>
-          </a:bodyPr>
-          <a:lstStyle/>
-          <a:p>
-            <a:pPr>
-              <a:lnSpc>
-                <a:spcPts val="2200"/>
-              </a:lnSpc>
-              <a:spcAft>
-                <a:spcPts val="1000"/>
-              </a:spcAft>
-              <a:defRPr sz="2000" b="0">
-                <a:solidFill>
-                  <a:srgbClr val="333333"/>
-                </a:solidFill>
-                <a:latin typeface="Calibri"/>
-              </a:defRPr>
-            </a:pPr>
-            <a:r>
-              <a:t>• `make SIM=verilator TEST=test_spi_uvm`;</a:t>
-            </a:r>
-          </a:p>
-          <a:p>
-            <a:pPr>
-              <a:lnSpc>
-                <a:spcPts val="2200"/>
-              </a:lnSpc>
-              <a:spcAft>
-                <a:spcPts val="1000"/>
-              </a:spcAft>
-              <a:defRPr sz="2000" b="0">
-                <a:solidFill>
-                  <a:srgbClr val="333333"/>
-                </a:solidFill>
-                <a:latin typeface="Calibri"/>
-              </a:defRPr>
-            </a:pPr>
-            <a:r>
-              <a:t>      `+UVM_TESTNAME=SpiTest`.</a:t>
-            </a:r>
-          </a:p>
-        </p:txBody>
-      </p:sp>
-      <p:sp>
-        <p:nvSpPr>
-          <p:cNvPr id="4" name="TextBox 3"/>
           <p:cNvSpPr txBox="1"/>
           <p:nvPr/>
         </p:nvSpPr>
@@ -6617,8 +8003,8 @@
         </p:nvSpPr>
         <p:spPr>
           <a:xfrm>
-            <a:off x="548640" y="2743200"/>
-            <a:ext cx="11064240" cy="1371600"/>
+            <a:off x="548640" y="411480"/>
+            <a:ext cx="11064240" cy="777240"/>
           </a:xfrm>
           <a:prstGeom prst="rect">
             <a:avLst/>
@@ -6631,11 +8017,11 @@
           </a:bodyPr>
           <a:lstStyle/>
           <a:p>
-            <a:pPr algn="ctr">
-              <a:lnSpc>
-                <a:spcPts val="2200"/>
-              </a:lnSpc>
-              <a:defRPr sz="3600" b="1">
+            <a:pPr>
+              <a:lnSpc>
+                <a:spcPts val="2200"/>
+              </a:lnSpc>
+              <a:defRPr sz="2800" b="1">
                 <a:solidFill>
                   <a:srgbClr val="1A1A2E"/>
                 </a:solidFill>
@@ -6643,7 +8029,7 @@
               </a:defRPr>
             </a:pPr>
             <a:r>
-              <a:t>Hands-on examples</a:t>
+              <a:t>1. Mode 0 in the testbench</a:t>
             </a:r>
           </a:p>
         </p:txBody>
@@ -6651,6 +8037,110 @@
       <p:sp>
         <p:nvSpPr>
           <p:cNvPr id="3" name="TextBox 2"/>
+          <p:cNvSpPr txBox="1"/>
+          <p:nvPr/>
+        </p:nvSpPr>
+        <p:spPr>
+          <a:xfrm>
+            <a:off x="548640" y="1234440"/>
+            <a:ext cx="5303520" cy="4754880"/>
+          </a:xfrm>
+          <a:prstGeom prst="rect">
+            <a:avLst/>
+          </a:prstGeom>
+          <a:noFill/>
+        </p:spPr>
+        <p:txBody>
+          <a:bodyPr wrap="square">
+            <a:noAutofit/>
+          </a:bodyPr>
+          <a:lstStyle/>
+          <a:p>
+            <a:pPr>
+              <a:lnSpc>
+                <a:spcPts val="2200"/>
+              </a:lnSpc>
+              <a:spcAft>
+                <a:spcPts val="1000"/>
+              </a:spcAft>
+              <a:defRPr sz="2000" b="0">
+                <a:solidFill>
+                  <a:srgbClr val="333333"/>
+                </a:solidFill>
+                <a:latin typeface="Calibri"/>
+              </a:defRPr>
+            </a:pPr>
+            <a:r>
+              <a:t>• Monitor must use rising-edge</a:t>
+            </a:r>
+          </a:p>
+          <a:p>
+            <a:pPr>
+              <a:lnSpc>
+                <a:spcPts val="2200"/>
+              </a:lnSpc>
+              <a:spcAft>
+                <a:spcPts val="1000"/>
+              </a:spcAft>
+              <a:defRPr sz="2000" b="0">
+                <a:solidFill>
+                  <a:srgbClr val="333333"/>
+                </a:solidFill>
+                <a:latin typeface="Calibri"/>
+              </a:defRPr>
+            </a:pPr>
+            <a:r>
+              <a:t>      capture and falling-edge change</a:t>
+            </a:r>
+          </a:p>
+          <a:p>
+            <a:pPr>
+              <a:lnSpc>
+                <a:spcPts val="2200"/>
+              </a:lnSpc>
+              <a:spcAft>
+                <a:spcPts val="1000"/>
+              </a:spcAft>
+              <a:defRPr sz="2000" b="0">
+                <a:solidFill>
+                  <a:srgbClr val="333333"/>
+                </a:solidFill>
+                <a:latin typeface="Calibri"/>
+              </a:defRPr>
+            </a:pPr>
+            <a:r>
+              <a:t>      — matches CPOL/CPHA=0.</a:t>
+            </a:r>
+          </a:p>
+        </p:txBody>
+      </p:sp>
+      <p:pic>
+        <p:nvPicPr>
+          <p:cNvPr id="4" name="Picture 3" descr="testing_methods.png"/>
+          <p:cNvPicPr>
+            <a:picLocks noChangeAspect="1"/>
+          </p:cNvPicPr>
+          <p:nvPr/>
+        </p:nvPicPr>
+        <p:blipFill>
+          <a:blip r:embed="rId2"/>
+          <a:stretch>
+            <a:fillRect/>
+          </a:stretch>
+        </p:blipFill>
+        <p:spPr>
+          <a:xfrm>
+            <a:off x="6172200" y="2094547"/>
+            <a:ext cx="5394960" cy="3034665"/>
+          </a:xfrm>
+          <a:prstGeom prst="rect">
+            <a:avLst/>
+          </a:prstGeom>
+        </p:spPr>
+      </p:pic>
+      <p:sp>
+        <p:nvSpPr>
+          <p:cNvPr id="5" name="TextBox 4"/>
           <p:cNvSpPr txBox="1"/>
           <p:nvPr/>
         </p:nvSpPr>
@@ -6739,7 +8229,7 @@
               </a:defRPr>
             </a:pPr>
             <a:r>
-              <a:t>Module 6 self-check</a:t>
+              <a:t>2. Directed regression</a:t>
             </a:r>
           </a:p>
         </p:txBody>
@@ -6752,15 +8242,13 @@
         </p:nvSpPr>
         <p:spPr>
           <a:xfrm>
-            <a:off x="548640" y="1051560"/>
-            <a:ext cx="11064240" cy="914400"/>
-          </a:xfrm>
-          <a:prstGeom prst="rect">
-            <a:avLst/>
-          </a:prstGeom>
-          <a:solidFill>
-            <a:srgbClr val="F4F4F4"/>
-          </a:solidFill>
+            <a:off x="548640" y="1234440"/>
+            <a:ext cx="5303520" cy="4754880"/>
+          </a:xfrm>
+          <a:prstGeom prst="rect">
+            <a:avLst/>
+          </a:prstGeom>
+          <a:noFill/>
         </p:spPr>
         <p:txBody>
           <a:bodyPr wrap="square">
@@ -6773,24 +8261,62 @@
                 <a:spcPts val="2200"/>
               </a:lnSpc>
               <a:spcAft>
-                <a:spcPts val="200"/>
-              </a:spcAft>
-              <a:defRPr sz="2000" b="0">
-                <a:solidFill>
-                  <a:srgbClr val="333333"/>
-                </a:solidFill>
-                <a:latin typeface="Consolas"/>
-              </a:defRPr>
-            </a:pPr>
-            <a:r>
-              <a:t>$ ./scripts/module6.sh --help</a:t>
+                <a:spcPts val="1000"/>
+              </a:spcAft>
+              <a:defRPr sz="2000" b="0">
+                <a:solidFill>
+                  <a:srgbClr val="333333"/>
+                </a:solidFill>
+                <a:latin typeface="Calibri"/>
+              </a:defRPr>
+            </a:pPr>
+            <a:r>
+              <a:t>• Same byte pattern as UART UVM</a:t>
+            </a:r>
+          </a:p>
+          <a:p>
+            <a:pPr>
+              <a:lnSpc>
+                <a:spcPts val="2200"/>
+              </a:lnSpc>
+              <a:spcAft>
+                <a:spcPts val="1000"/>
+              </a:spcAft>
+              <a:defRPr sz="2000" b="0">
+                <a:solidFill>
+                  <a:srgbClr val="333333"/>
+                </a:solidFill>
+                <a:latin typeface="Calibri"/>
+              </a:defRPr>
+            </a:pPr>
+            <a:r>
+              <a:t>      (0x00 … 0xFF) for apples-to-</a:t>
+            </a:r>
+          </a:p>
+          <a:p>
+            <a:pPr>
+              <a:lnSpc>
+                <a:spcPts val="2200"/>
+              </a:lnSpc>
+              <a:spcAft>
+                <a:spcPts val="1000"/>
+              </a:spcAft>
+              <a:defRPr sz="2000" b="0">
+                <a:solidFill>
+                  <a:srgbClr val="333333"/>
+                </a:solidFill>
+                <a:latin typeface="Calibri"/>
+              </a:defRPr>
+            </a:pPr>
+            <a:r>
+              <a:t>      apples learning.</a:t>
             </a:r>
           </a:p>
         </p:txBody>
       </p:sp>
       <p:pic>
         <p:nvPicPr>
-          <p:cNvPr id="4" name="Picture 3" descr="module6_check.png"/>
+          <p:cNvPr id="4" name="Picture 3" descr="testing_methods.png"/>
           <p:cNvPicPr>
             <a:picLocks noChangeAspect="1"/>
           </p:cNvPicPr>
@@ -6804,8 +8330,8 @@
         </p:blipFill>
         <p:spPr>
           <a:xfrm>
-            <a:off x="548640" y="1965960"/>
-            <a:ext cx="7071358" cy="3977639"/>
+            <a:off x="6172200" y="2094547"/>
+            <a:ext cx="5394960" cy="3034665"/>
           </a:xfrm>
           <a:prstGeom prst="rect">
             <a:avLst/>
@@ -6903,7 +8429,7 @@
               </a:defRPr>
             </a:pPr>
             <a:r>
-              <a:t>Exercise scaffold</a:t>
+              <a:t>3. Extensions</a:t>
             </a:r>
           </a:p>
         </p:txBody>
@@ -6916,15 +8442,13 @@
         </p:nvSpPr>
         <p:spPr>
           <a:xfrm>
-            <a:off x="548640" y="1143000"/>
-            <a:ext cx="11064240" cy="5029200"/>
-          </a:xfrm>
-          <a:prstGeom prst="rect">
-            <a:avLst/>
-          </a:prstGeom>
-          <a:solidFill>
-            <a:srgbClr val="F4F4F4"/>
-          </a:solidFill>
+            <a:off x="548640" y="1234440"/>
+            <a:ext cx="5303520" cy="4754880"/>
+          </a:xfrm>
+          <a:prstGeom prst="rect">
+            <a:avLst/>
+          </a:prstGeom>
+          <a:noFill/>
         </p:spPr>
         <p:txBody>
           <a:bodyPr wrap="square">
@@ -6937,24 +8461,105 @@
                 <a:spcPts val="2200"/>
               </a:lnSpc>
               <a:spcAft>
-                <a:spcPts val="400"/>
-              </a:spcAft>
-              <a:defRPr sz="2000" b="0">
-                <a:solidFill>
-                  <a:srgbClr val="333333"/>
-                </a:solidFill>
-                <a:latin typeface="Consolas"/>
-              </a:defRPr>
-            </a:pPr>
-            <a:r>
-              <a:t>./scripts/module6.sh --scaffold</a:t>
-            </a:r>
-          </a:p>
-        </p:txBody>
-      </p:sp>
-      <p:sp>
-        <p:nvSpPr>
-          <p:cNvPr id="4" name="TextBox 3"/>
+                <a:spcPts val="1000"/>
+              </a:spcAft>
+              <a:defRPr sz="2000" b="0">
+                <a:solidFill>
+                  <a:srgbClr val="333333"/>
+                </a:solidFill>
+                <a:latin typeface="Calibri"/>
+              </a:defRPr>
+            </a:pPr>
+            <a:r>
+              <a:t>• MISO reads, random data, mode</a:t>
+            </a:r>
+          </a:p>
+          <a:p>
+            <a:pPr>
+              <a:lnSpc>
+                <a:spcPts val="2200"/>
+              </a:lnSpc>
+              <a:spcAft>
+                <a:spcPts val="1000"/>
+              </a:spcAft>
+              <a:defRPr sz="2000" b="0">
+                <a:solidFill>
+                  <a:srgbClr val="333333"/>
+                </a:solidFill>
+                <a:latin typeface="Calibri"/>
+              </a:defRPr>
+            </a:pPr>
+            <a:r>
+              <a:t>      parameters — see [LEARNING_GUIDE</a:t>
+            </a:r>
+          </a:p>
+          <a:p>
+            <a:pPr>
+              <a:lnSpc>
+                <a:spcPts val="2200"/>
+              </a:lnSpc>
+              <a:spcAft>
+                <a:spcPts val="1000"/>
+              </a:spcAft>
+              <a:defRPr sz="2000" b="0">
+                <a:solidFill>
+                  <a:srgbClr val="333333"/>
+                </a:solidFill>
+                <a:latin typeface="Calibri"/>
+              </a:defRPr>
+            </a:pPr>
+            <a:r>
+              <a:t>      § 7](LEARNING_GUIDE_PROTOCOLS_AN</a:t>
+            </a:r>
+          </a:p>
+          <a:p>
+            <a:pPr>
+              <a:lnSpc>
+                <a:spcPts val="2200"/>
+              </a:lnSpc>
+              <a:spcAft>
+                <a:spcPts val="1000"/>
+              </a:spcAft>
+              <a:defRPr sz="2000" b="0">
+                <a:solidFill>
+                  <a:srgbClr val="333333"/>
+                </a:solidFill>
+                <a:latin typeface="Calibri"/>
+              </a:defRPr>
+            </a:pPr>
+            <a:r>
+              <a:t>      D_UV…</a:t>
+            </a:r>
+          </a:p>
+        </p:txBody>
+      </p:sp>
+      <p:pic>
+        <p:nvPicPr>
+          <p:cNvPr id="4" name="Picture 3" descr="testing_methods.png"/>
+          <p:cNvPicPr>
+            <a:picLocks noChangeAspect="1"/>
+          </p:cNvPicPr>
+          <p:nvPr/>
+        </p:nvPicPr>
+        <p:blipFill>
+          <a:blip r:embed="rId2"/>
+          <a:stretch>
+            <a:fillRect/>
+          </a:stretch>
+        </p:blipFill>
+        <p:spPr>
+          <a:xfrm>
+            <a:off x="6172200" y="2094547"/>
+            <a:ext cx="5394960" cy="3034665"/>
+          </a:xfrm>
+          <a:prstGeom prst="rect">
+            <a:avLst/>
+          </a:prstGeom>
+        </p:spPr>
+      </p:pic>
+      <p:sp>
+        <p:nvSpPr>
+          <p:cNvPr id="5" name="TextBox 4"/>
           <p:cNvSpPr txBox="1"/>
           <p:nvPr/>
         </p:nvSpPr>
@@ -7017,8 +8622,8 @@
         </p:nvSpPr>
         <p:spPr>
           <a:xfrm>
-            <a:off x="548640" y="411480"/>
-            <a:ext cx="11064240" cy="777240"/>
+            <a:off x="548640" y="2743200"/>
+            <a:ext cx="11064240" cy="1371600"/>
           </a:xfrm>
           <a:prstGeom prst="rect">
             <a:avLst/>
@@ -7031,11 +8636,11 @@
           </a:bodyPr>
           <a:lstStyle/>
           <a:p>
-            <a:pPr>
-              <a:lnSpc>
-                <a:spcPts val="2200"/>
-              </a:lnSpc>
-              <a:defRPr sz="2800" b="1">
+            <a:pPr algn="ctr">
+              <a:lnSpc>
+                <a:spcPts val="2200"/>
+              </a:lnSpc>
+              <a:defRPr sz="3600" b="1">
                 <a:solidFill>
                   <a:srgbClr val="1A1A2E"/>
                 </a:solidFill>
@@ -7043,7 +8648,7 @@
               </a:defRPr>
             </a:pPr>
             <a:r>
-              <a:t>Example 1: SPI UVM</a:t>
+              <a:t>Syllabus topics</a:t>
             </a:r>
           </a:p>
         </p:txBody>
@@ -7051,124 +8656,6 @@
       <p:sp>
         <p:nvSpPr>
           <p:cNvPr id="3" name="TextBox 2"/>
-          <p:cNvSpPr txBox="1"/>
-          <p:nvPr/>
-        </p:nvSpPr>
-        <p:spPr>
-          <a:xfrm>
-            <a:off x="548640" y="1234440"/>
-            <a:ext cx="11064240" cy="4937760"/>
-          </a:xfrm>
-          <a:prstGeom prst="rect">
-            <a:avLst/>
-          </a:prstGeom>
-          <a:noFill/>
-        </p:spPr>
-        <p:txBody>
-          <a:bodyPr wrap="square">
-            <a:noAutofit/>
-          </a:bodyPr>
-          <a:lstStyle/>
-          <a:p>
-            <a:pPr>
-              <a:lnSpc>
-                <a:spcPts val="2200"/>
-              </a:lnSpc>
-              <a:spcAft>
-                <a:spcPts val="1000"/>
-              </a:spcAft>
-              <a:defRPr sz="2000" b="0">
-                <a:solidFill>
-                  <a:srgbClr val="333333"/>
-                </a:solidFill>
-                <a:latin typeface="Calibri"/>
-              </a:defRPr>
-            </a:pPr>
-            <a:r>
-              <a:t>• UVM phases and reporting (DRIVER, MONITOR,</a:t>
-            </a:r>
-          </a:p>
-          <a:p>
-            <a:pPr>
-              <a:lnSpc>
-                <a:spcPts val="2200"/>
-              </a:lnSpc>
-              <a:spcAft>
-                <a:spcPts val="1000"/>
-              </a:spcAft>
-              <a:defRPr sz="2000" b="0">
-                <a:solidFill>
-                  <a:srgbClr val="333333"/>
-                </a:solidFill>
-                <a:latin typeface="Calibri"/>
-              </a:defRPr>
-            </a:pPr>
-            <a:r>
-              <a:t>      SCOREBOARD).</a:t>
-            </a:r>
-          </a:p>
-          <a:p>
-            <a:pPr>
-              <a:lnSpc>
-                <a:spcPts val="2200"/>
-              </a:lnSpc>
-              <a:spcAft>
-                <a:spcPts val="1000"/>
-              </a:spcAft>
-              <a:defRPr sz="2000" b="0">
-                <a:solidFill>
-                  <a:srgbClr val="333333"/>
-                </a:solidFill>
-                <a:latin typeface="Calibri"/>
-              </a:defRPr>
-            </a:pPr>
-            <a:r>
-              <a:t>• Scoreboard checks (expected byte from sequence vs</a:t>
-            </a:r>
-          </a:p>
-          <a:p>
-            <a:pPr>
-              <a:lnSpc>
-                <a:spcPts val="2200"/>
-              </a:lnSpc>
-              <a:spcAft>
-                <a:spcPts val="1000"/>
-              </a:spcAft>
-              <a:defRPr sz="2000" b="0">
-                <a:solidFill>
-                  <a:srgbClr val="333333"/>
-                </a:solidFill>
-                <a:latin typeface="Calibri"/>
-              </a:defRPr>
-            </a:pPr>
-            <a:r>
-              <a:t>      observed byte on MOSI).</a:t>
-            </a:r>
-          </a:p>
-          <a:p>
-            <a:pPr>
-              <a:lnSpc>
-                <a:spcPts val="2200"/>
-              </a:lnSpc>
-              <a:spcAft>
-                <a:spcPts val="1000"/>
-              </a:spcAft>
-              <a:defRPr sz="2000" b="0">
-                <a:solidFill>
-                  <a:srgbClr val="333333"/>
-                </a:solidFill>
-                <a:latin typeface="Calibri"/>
-              </a:defRPr>
-            </a:pPr>
-            <a:r>
-              <a:t>• Final scoreboard summary (matches and mismatches).</a:t>
-            </a:r>
-          </a:p>
-        </p:txBody>
-      </p:sp>
-      <p:sp>
-        <p:nvSpPr>
-          <p:cNvPr id="4" name="TextBox 3"/>
           <p:cNvSpPr txBox="1"/>
           <p:nvPr/>
         </p:nvSpPr>
@@ -7257,7 +8744,7 @@
               </a:defRPr>
             </a:pPr>
             <a:r>
-              <a:t>Demo: SPI UVM</a:t>
+              <a:t>1. SPI protocol recap (Mode 0)</a:t>
             </a:r>
           </a:p>
         </p:txBody>
@@ -7270,15 +8757,13 @@
         </p:nvSpPr>
         <p:spPr>
           <a:xfrm>
-            <a:off x="548640" y="1051560"/>
-            <a:ext cx="11064240" cy="914400"/>
-          </a:xfrm>
-          <a:prstGeom prst="rect">
-            <a:avLst/>
-          </a:prstGeom>
-          <a:solidFill>
-            <a:srgbClr val="F4F4F4"/>
-          </a:solidFill>
+            <a:off x="548640" y="1234440"/>
+            <a:ext cx="11064240" cy="4937760"/>
+          </a:xfrm>
+          <a:prstGeom prst="rect">
+            <a:avLst/>
+          </a:prstGeom>
+          <a:noFill/>
         </p:spPr>
         <p:txBody>
           <a:bodyPr wrap="square">
@@ -7291,48 +8776,43 @@
                 <a:spcPts val="2200"/>
               </a:lnSpc>
               <a:spcAft>
-                <a:spcPts val="200"/>
-              </a:spcAft>
-              <a:defRPr sz="2000" b="0">
-                <a:solidFill>
-                  <a:srgbClr val="333333"/>
-                </a:solidFill>
-                <a:latin typeface="Consolas"/>
-              </a:defRPr>
-            </a:pPr>
-            <a:r>
-              <a:t>$ ./scripts/module6.sh --run</a:t>
-            </a:r>
-          </a:p>
-        </p:txBody>
-      </p:sp>
-      <p:pic>
-        <p:nvPicPr>
-          <p:cNvPr id="4" name="Picture 3" descr="spi_uvm.png"/>
-          <p:cNvPicPr>
-            <a:picLocks noChangeAspect="1"/>
-          </p:cNvPicPr>
-          <p:nvPr/>
-        </p:nvPicPr>
-        <p:blipFill>
-          <a:blip r:embed="rId2"/>
-          <a:stretch>
-            <a:fillRect/>
-          </a:stretch>
-        </p:blipFill>
-        <p:spPr>
-          <a:xfrm>
-            <a:off x="548640" y="1965960"/>
-            <a:ext cx="7071358" cy="3977639"/>
-          </a:xfrm>
-          <a:prstGeom prst="rect">
-            <a:avLst/>
-          </a:prstGeom>
-        </p:spPr>
-      </p:pic>
-      <p:sp>
-        <p:nvSpPr>
-          <p:cNvPr id="5" name="TextBox 4"/>
+                <a:spcPts val="1000"/>
+              </a:spcAft>
+              <a:defRPr sz="2000" b="0">
+                <a:solidFill>
+                  <a:srgbClr val="333333"/>
+                </a:solidFill>
+                <a:latin typeface="Calibri"/>
+              </a:defRPr>
+            </a:pPr>
+            <a:r>
+              <a:t>• `cs_n` frames; 8 SCLK cycles per byte; MSB first on</a:t>
+            </a:r>
+          </a:p>
+          <a:p>
+            <a:pPr>
+              <a:lnSpc>
+                <a:spcPts val="2200"/>
+              </a:lnSpc>
+              <a:spcAft>
+                <a:spcPts val="1000"/>
+              </a:spcAft>
+              <a:defRPr sz="2000" b="0">
+                <a:solidFill>
+                  <a:srgbClr val="333333"/>
+                </a:solidFill>
+                <a:latin typeface="Calibri"/>
+              </a:defRPr>
+            </a:pPr>
+            <a:r>
+              <a:t>      MOSI.</a:t>
+            </a:r>
+          </a:p>
+        </p:txBody>
+      </p:sp>
+      <p:sp>
+        <p:nvSpPr>
+          <p:cNvPr id="4" name="TextBox 3"/>
           <p:cNvSpPr txBox="1"/>
           <p:nvPr/>
         </p:nvSpPr>
@@ -7395,8 +8875,8 @@
         </p:nvSpPr>
         <p:spPr>
           <a:xfrm>
-            <a:off x="548640" y="2743200"/>
-            <a:ext cx="11064240" cy="1371600"/>
+            <a:off x="548640" y="411480"/>
+            <a:ext cx="11064240" cy="777240"/>
           </a:xfrm>
           <a:prstGeom prst="rect">
             <a:avLst/>
@@ -7409,11 +8889,11 @@
           </a:bodyPr>
           <a:lstStyle/>
           <a:p>
-            <a:pPr algn="ctr">
-              <a:lnSpc>
-                <a:spcPts val="2200"/>
-              </a:lnSpc>
-              <a:defRPr sz="3600" b="1">
+            <a:pPr>
+              <a:lnSpc>
+                <a:spcPts val="2200"/>
+              </a:lnSpc>
+              <a:defRPr sz="2800" b="1">
                 <a:solidFill>
                   <a:srgbClr val="1A1A2E"/>
                 </a:solidFill>
@@ -7421,7 +8901,7 @@
               </a:defRPr>
             </a:pPr>
             <a:r>
-              <a:t>Practice &amp; assessment</a:t>
+              <a:t>2. Toolchain</a:t>
             </a:r>
           </a:p>
         </p:txBody>
@@ -7429,6 +8909,67 @@
       <p:sp>
         <p:nvSpPr>
           <p:cNvPr id="3" name="TextBox 2"/>
+          <p:cNvSpPr txBox="1"/>
+          <p:nvPr/>
+        </p:nvSpPr>
+        <p:spPr>
+          <a:xfrm>
+            <a:off x="548640" y="1234440"/>
+            <a:ext cx="11064240" cy="4937760"/>
+          </a:xfrm>
+          <a:prstGeom prst="rect">
+            <a:avLst/>
+          </a:prstGeom>
+          <a:noFill/>
+        </p:spPr>
+        <p:txBody>
+          <a:bodyPr wrap="square">
+            <a:noAutofit/>
+          </a:bodyPr>
+          <a:lstStyle/>
+          <a:p>
+            <a:pPr>
+              <a:lnSpc>
+                <a:spcPts val="2200"/>
+              </a:lnSpc>
+              <a:spcAft>
+                <a:spcPts val="1000"/>
+              </a:spcAft>
+              <a:defRPr sz="2000" b="0">
+                <a:solidFill>
+                  <a:srgbClr val="333333"/>
+                </a:solidFill>
+                <a:latin typeface="Calibri"/>
+              </a:defRPr>
+            </a:pPr>
+            <a:r>
+              <a:t>• `make SIM=verilator TEST=test_spi_uvm`;</a:t>
+            </a:r>
+          </a:p>
+          <a:p>
+            <a:pPr>
+              <a:lnSpc>
+                <a:spcPts val="2200"/>
+              </a:lnSpc>
+              <a:spcAft>
+                <a:spcPts val="1000"/>
+              </a:spcAft>
+              <a:defRPr sz="2000" b="0">
+                <a:solidFill>
+                  <a:srgbClr val="333333"/>
+                </a:solidFill>
+                <a:latin typeface="Calibri"/>
+              </a:defRPr>
+            </a:pPr>
+            <a:r>
+              <a:t>      `+UVM_TESTNAME=SpiTest`.</a:t>
+            </a:r>
+          </a:p>
+        </p:txBody>
+      </p:sp>
+      <p:sp>
+        <p:nvSpPr>
+          <p:cNvPr id="4" name="TextBox 3"/>
           <p:cNvSpPr txBox="1"/>
           <p:nvPr/>
         </p:nvSpPr>
@@ -7491,8 +9032,8 @@
         </p:nvSpPr>
         <p:spPr>
           <a:xfrm>
-            <a:off x="548640" y="411480"/>
-            <a:ext cx="11064240" cy="777240"/>
+            <a:off x="548640" y="2743200"/>
+            <a:ext cx="11064240" cy="1371600"/>
           </a:xfrm>
           <a:prstGeom prst="rect">
             <a:avLst/>
@@ -7505,11 +9046,11 @@
           </a:bodyPr>
           <a:lstStyle/>
           <a:p>
-            <a:pPr>
-              <a:lnSpc>
-                <a:spcPts val="2200"/>
-              </a:lnSpc>
-              <a:defRPr sz="2800" b="1">
+            <a:pPr algn="ctr">
+              <a:lnSpc>
+                <a:spcPts val="2200"/>
+              </a:lnSpc>
+              <a:defRPr sz="3600" b="1">
                 <a:solidFill>
                   <a:srgbClr val="1A1A2E"/>
                 </a:solidFill>
@@ -7517,7 +9058,7 @@
               </a:defRPr>
             </a:pPr>
             <a:r>
-              <a:t>What you should know</a:t>
+              <a:t>Hands-on examples</a:t>
             </a:r>
           </a:p>
         </p:txBody>
@@ -7525,124 +9066,6 @@
       <p:sp>
         <p:nvSpPr>
           <p:cNvPr id="3" name="TextBox 2"/>
-          <p:cNvSpPr txBox="1"/>
-          <p:nvPr/>
-        </p:nvSpPr>
-        <p:spPr>
-          <a:xfrm>
-            <a:off x="548640" y="1234440"/>
-            <a:ext cx="11064240" cy="4937760"/>
-          </a:xfrm>
-          <a:prstGeom prst="rect">
-            <a:avLst/>
-          </a:prstGeom>
-          <a:noFill/>
-        </p:spPr>
-        <p:txBody>
-          <a:bodyPr wrap="square">
-            <a:noAutofit/>
-          </a:bodyPr>
-          <a:lstStyle/>
-          <a:p>
-            <a:pPr>
-              <a:lnSpc>
-                <a:spcPts val="2200"/>
-              </a:lnSpc>
-              <a:spcAft>
-                <a:spcPts val="1000"/>
-              </a:spcAft>
-              <a:defRPr sz="2000" b="0">
-                <a:solidFill>
-                  <a:srgbClr val="333333"/>
-                </a:solidFill>
-                <a:latin typeface="Calibri"/>
-              </a:defRPr>
-            </a:pPr>
-            <a:r>
-              <a:t>• Describe the SPI UVM agent (transaction, sequence,</a:t>
-            </a:r>
-          </a:p>
-          <a:p>
-            <a:pPr>
-              <a:lnSpc>
-                <a:spcPts val="2200"/>
-              </a:lnSpc>
-              <a:spcAft>
-                <a:spcPts val="1000"/>
-              </a:spcAft>
-              <a:defRPr sz="2000" b="0">
-                <a:solidFill>
-                  <a:srgbClr val="333333"/>
-                </a:solidFill>
-                <a:latin typeface="Calibri"/>
-              </a:defRPr>
-            </a:pPr>
-            <a:r>
-              <a:t>      driver, monitor, scoreboard) and mode 0 monitori…</a:t>
-            </a:r>
-          </a:p>
-          <a:p>
-            <a:pPr>
-              <a:lnSpc>
-                <a:spcPts val="2200"/>
-              </a:lnSpc>
-              <a:spcAft>
-                <a:spcPts val="1000"/>
-              </a:spcAft>
-              <a:defRPr sz="2000" b="0">
-                <a:solidFill>
-                  <a:srgbClr val="333333"/>
-                </a:solidFill>
-                <a:latin typeface="Calibri"/>
-              </a:defRPr>
-            </a:pPr>
-            <a:r>
-              <a:t>• Run spi_uvm and interpret UVM output.</a:t>
-            </a:r>
-          </a:p>
-          <a:p>
-            <a:pPr>
-              <a:lnSpc>
-                <a:spcPts val="2200"/>
-              </a:lnSpc>
-              <a:spcAft>
-                <a:spcPts val="1000"/>
-              </a:spcAft>
-              <a:defRPr sz="2000" b="0">
-                <a:solidFill>
-                  <a:srgbClr val="333333"/>
-                </a:solidFill>
-                <a:latin typeface="Calibri"/>
-              </a:defRPr>
-            </a:pPr>
-            <a:r>
-              <a:t>• Ready for Module 7: I²C protocol + RTL + basic</a:t>
-            </a:r>
-          </a:p>
-          <a:p>
-            <a:pPr>
-              <a:lnSpc>
-                <a:spcPts val="2200"/>
-              </a:lnSpc>
-              <a:spcAft>
-                <a:spcPts val="1000"/>
-              </a:spcAft>
-              <a:defRPr sz="2000" b="0">
-                <a:solidFill>
-                  <a:srgbClr val="333333"/>
-                </a:solidFill>
-                <a:latin typeface="Calibri"/>
-              </a:defRPr>
-            </a:pPr>
-            <a:r>
-              <a:t>      testbench.</a:t>
-            </a:r>
-          </a:p>
-        </p:txBody>
-      </p:sp>
-      <p:sp>
-        <p:nvSpPr>
-          <p:cNvPr id="4" name="TextBox 3"/>
           <p:cNvSpPr txBox="1"/>
           <p:nvPr/>
         </p:nvSpPr>
@@ -7731,7 +9154,7 @@
               </a:defRPr>
             </a:pPr>
             <a:r>
-              <a:t>Exercises</a:t>
+              <a:t>Module 6 self-check</a:t>
             </a:r>
           </a:p>
         </p:txBody>
@@ -7744,13 +9167,15 @@
         </p:nvSpPr>
         <p:spPr>
           <a:xfrm>
-            <a:off x="548640" y="1234440"/>
-            <a:ext cx="11064240" cy="4937760"/>
-          </a:xfrm>
-          <a:prstGeom prst="rect">
-            <a:avLst/>
-          </a:prstGeom>
-          <a:noFill/>
+            <a:off x="548640" y="1051560"/>
+            <a:ext cx="11064240" cy="914400"/>
+          </a:xfrm>
+          <a:prstGeom prst="rect">
+            <a:avLst/>
+          </a:prstGeom>
+          <a:solidFill>
+            <a:srgbClr val="F4F4F4"/>
+          </a:solidFill>
         </p:spPr>
         <p:txBody>
           <a:bodyPr wrap="square">
@@ -7763,81 +9188,48 @@
                 <a:spcPts val="2200"/>
               </a:lnSpc>
               <a:spcAft>
-                <a:spcPts val="1000"/>
-              </a:spcAft>
-              <a:defRPr sz="2000" b="0">
-                <a:solidFill>
-                  <a:srgbClr val="333333"/>
-                </a:solidFill>
-                <a:latin typeface="Calibri"/>
-              </a:defRPr>
-            </a:pPr>
-            <a:r>
-              <a:t>• Run spi_uvm</a:t>
-            </a:r>
-          </a:p>
-          <a:p>
-            <a:pPr>
-              <a:lnSpc>
-                <a:spcPts val="2200"/>
-              </a:lnSpc>
-              <a:spcAft>
-                <a:spcPts val="1000"/>
-              </a:spcAft>
-              <a:defRPr sz="2000" b="0">
-                <a:solidFill>
-                  <a:srgbClr val="333333"/>
-                </a:solidFill>
-                <a:latin typeface="Calibri"/>
-              </a:defRPr>
-            </a:pPr>
-            <a:r>
-              <a:t>• Trace one transaction</a:t>
-            </a:r>
-          </a:p>
-          <a:p>
-            <a:pPr>
-              <a:lnSpc>
-                <a:spcPts val="2200"/>
-              </a:lnSpc>
-              <a:spcAft>
-                <a:spcPts val="1000"/>
-              </a:spcAft>
-              <a:defRPr sz="2000" b="0">
-                <a:solidFill>
-                  <a:srgbClr val="333333"/>
-                </a:solidFill>
-                <a:latin typeface="Calibri"/>
-              </a:defRPr>
-            </a:pPr>
-            <a:r>
-              <a:t>• Change the sequence</a:t>
-            </a:r>
-          </a:p>
-          <a:p>
-            <a:pPr>
-              <a:lnSpc>
-                <a:spcPts val="2200"/>
-              </a:lnSpc>
-              <a:spcAft>
-                <a:spcPts val="1000"/>
-              </a:spcAft>
-              <a:defRPr sz="2000" b="0">
-                <a:solidFill>
-                  <a:srgbClr val="333333"/>
-                </a:solidFill>
-                <a:latin typeface="Calibri"/>
-              </a:defRPr>
-            </a:pPr>
-            <a:r>
-              <a:t>• Optional: Compare to UART UVM</a:t>
-            </a:r>
-          </a:p>
-        </p:txBody>
-      </p:sp>
-      <p:sp>
-        <p:nvSpPr>
-          <p:cNvPr id="4" name="TextBox 3"/>
+                <a:spcPts val="200"/>
+              </a:spcAft>
+              <a:defRPr sz="2000" b="0">
+                <a:solidFill>
+                  <a:srgbClr val="333333"/>
+                </a:solidFill>
+                <a:latin typeface="Consolas"/>
+              </a:defRPr>
+            </a:pPr>
+            <a:r>
+              <a:t>$ ./scripts/module6.sh --help</a:t>
+            </a:r>
+          </a:p>
+        </p:txBody>
+      </p:sp>
+      <p:pic>
+        <p:nvPicPr>
+          <p:cNvPr id="4" name="Picture 3" descr="module6_check.png"/>
+          <p:cNvPicPr>
+            <a:picLocks noChangeAspect="1"/>
+          </p:cNvPicPr>
+          <p:nvPr/>
+        </p:nvPicPr>
+        <p:blipFill>
+          <a:blip r:embed="rId2"/>
+          <a:stretch>
+            <a:fillRect/>
+          </a:stretch>
+        </p:blipFill>
+        <p:spPr>
+          <a:xfrm>
+            <a:off x="548640" y="1965960"/>
+            <a:ext cx="7071358" cy="3977639"/>
+          </a:xfrm>
+          <a:prstGeom prst="rect">
+            <a:avLst/>
+          </a:prstGeom>
+        </p:spPr>
+      </p:pic>
+      <p:sp>
+        <p:nvSpPr>
+          <p:cNvPr id="5" name="TextBox 4"/>
           <p:cNvSpPr txBox="1"/>
           <p:nvPr/>
         </p:nvSpPr>
@@ -8121,7 +9513,7 @@
               </a:defRPr>
             </a:pPr>
             <a:r>
-              <a:t>Assessment checklist</a:t>
+              <a:t>Example 1: SPI UVM agent</a:t>
             </a:r>
           </a:p>
         </p:txBody>
@@ -8163,7 +9555,7 @@
               </a:defRPr>
             </a:pPr>
             <a:r>
-              <a:t>• Can describe the SPI UVM agent and how it maps to</a:t>
+              <a:t>• SPI DUT from Module 5 with UVM driver, monitor, and</a:t>
             </a:r>
           </a:p>
           <a:p>
@@ -8182,7 +9574,7 @@
               </a:defRPr>
             </a:pPr>
             <a:r>
-              <a:t>      SPI (one byte, mode 0 monitoring).</a:t>
+              <a:t>      scoreboard</a:t>
             </a:r>
           </a:p>
           <a:p>
@@ -8201,7 +9593,7 @@
               </a:defRPr>
             </a:pPr>
             <a:r>
-              <a:t>• Can run spi_uvm and interpret UVM output.</a:t>
+              <a:t>• Monitor samples MOSI on rising SCLK (Mode 0, MSB</a:t>
             </a:r>
           </a:p>
           <a:p>
@@ -8220,7 +9612,7 @@
               </a:defRPr>
             </a:pPr>
             <a:r>
-              <a:t>• Ready for Module 7: I²C protocol + RTL + basic</a:t>
+              <a:t>      first)</a:t>
             </a:r>
           </a:p>
           <a:p>
@@ -8239,7 +9631,26 @@
               </a:defRPr>
             </a:pPr>
             <a:r>
-              <a:t>      testbench.</a:t>
+              <a:t>• Bus-centric checking vs relying only on the DUT</a:t>
+            </a:r>
+          </a:p>
+          <a:p>
+            <a:pPr>
+              <a:lnSpc>
+                <a:spcPts val="2200"/>
+              </a:lnSpc>
+              <a:spcAft>
+                <a:spcPts val="1000"/>
+              </a:spcAft>
+              <a:defRPr sz="2000" b="0">
+                <a:solidFill>
+                  <a:srgbClr val="333333"/>
+                </a:solidFill>
+                <a:latin typeface="Calibri"/>
+              </a:defRPr>
+            </a:pPr>
+            <a:r>
+              <a:t>      `done` flag</a:t>
             </a:r>
           </a:p>
         </p:txBody>
@@ -8335,7 +9746,7 @@
               </a:defRPr>
             </a:pPr>
             <a:r>
-              <a:t>Summary &amp; next steps</a:t>
+              <a:t>Demo: SPI UVM agent</a:t>
             </a:r>
           </a:p>
         </p:txBody>
@@ -8348,13 +9759,15 @@
         </p:nvSpPr>
         <p:spPr>
           <a:xfrm>
-            <a:off x="548640" y="1234440"/>
-            <a:ext cx="11064240" cy="4937760"/>
-          </a:xfrm>
-          <a:prstGeom prst="rect">
-            <a:avLst/>
-          </a:prstGeom>
-          <a:noFill/>
+            <a:off x="548640" y="1051560"/>
+            <a:ext cx="11064240" cy="914400"/>
+          </a:xfrm>
+          <a:prstGeom prst="rect">
+            <a:avLst/>
+          </a:prstGeom>
+          <a:solidFill>
+            <a:srgbClr val="F4F4F4"/>
+          </a:solidFill>
         </p:spPr>
         <p:txBody>
           <a:bodyPr wrap="square">
@@ -8367,6 +9780,264 @@
                 <a:spcPts val="2200"/>
               </a:lnSpc>
               <a:spcAft>
+                <a:spcPts val="200"/>
+              </a:spcAft>
+              <a:defRPr sz="2000" b="0">
+                <a:solidFill>
+                  <a:srgbClr val="333333"/>
+                </a:solidFill>
+                <a:latin typeface="Consolas"/>
+              </a:defRPr>
+            </a:pPr>
+            <a:r>
+              <a:t>$ cd module6/examples/spi_uvm &amp;&amp; make SIM=verilator TEST=test_spi_uvm</a:t>
+            </a:r>
+          </a:p>
+        </p:txBody>
+      </p:sp>
+      <p:pic>
+        <p:nvPicPr>
+          <p:cNvPr id="4" name="Picture 3" descr="ex01_spi_uvm.png"/>
+          <p:cNvPicPr>
+            <a:picLocks noChangeAspect="1"/>
+          </p:cNvPicPr>
+          <p:nvPr/>
+        </p:nvPicPr>
+        <p:blipFill>
+          <a:blip r:embed="rId2"/>
+          <a:stretch>
+            <a:fillRect/>
+          </a:stretch>
+        </p:blipFill>
+        <p:spPr>
+          <a:xfrm>
+            <a:off x="548640" y="1965960"/>
+            <a:ext cx="7071358" cy="3977639"/>
+          </a:xfrm>
+          <a:prstGeom prst="rect">
+            <a:avLst/>
+          </a:prstGeom>
+        </p:spPr>
+      </p:pic>
+      <p:sp>
+        <p:nvSpPr>
+          <p:cNvPr id="5" name="TextBox 4"/>
+          <p:cNvSpPr txBox="1"/>
+          <p:nvPr/>
+        </p:nvSpPr>
+        <p:spPr>
+          <a:xfrm>
+            <a:off x="548640" y="6355080"/>
+            <a:ext cx="11064240" cy="320040"/>
+          </a:xfrm>
+          <a:prstGeom prst="rect">
+            <a:avLst/>
+          </a:prstGeom>
+          <a:noFill/>
+        </p:spPr>
+        <p:txBody>
+          <a:bodyPr wrap="square">
+            <a:noAutofit/>
+          </a:bodyPr>
+          <a:lstStyle/>
+          <a:p>
+            <a:pPr algn="r">
+              <a:lnSpc>
+                <a:spcPts val="2200"/>
+              </a:lnSpc>
+              <a:defRPr sz="1000" b="0">
+                <a:solidFill>
+                  <a:srgbClr val="666666"/>
+                </a:solidFill>
+                <a:latin typeface="Calibri"/>
+              </a:defRPr>
+            </a:pPr>
+            <a:r>
+              <a:t>learn_uart_spi_i2c / Module 6</a:t>
+            </a:r>
+          </a:p>
+        </p:txBody>
+      </p:sp>
+    </p:spTree>
+  </p:cSld>
+  <p:clrMapOvr>
+    <a:masterClrMapping/>
+  </p:clrMapOvr>
+</p:sld>
+</file>
+
+<file path=ppt/slides/slide32.xml><?xml version="1.0" encoding="utf-8"?>
+<p:sld xmlns:a="http://schemas.openxmlformats.org/drawingml/2006/main" xmlns:p="http://schemas.openxmlformats.org/presentationml/2006/main" xmlns:r="http://schemas.openxmlformats.org/officeDocument/2006/relationships">
+  <p:cSld>
+    <p:spTree>
+      <p:nvGrpSpPr>
+        <p:cNvPr id="1" name=""/>
+        <p:cNvGrpSpPr/>
+        <p:nvPr/>
+      </p:nvGrpSpPr>
+      <p:grpSpPr/>
+      <p:sp>
+        <p:nvSpPr>
+          <p:cNvPr id="2" name="TextBox 1"/>
+          <p:cNvSpPr txBox="1"/>
+          <p:nvPr/>
+        </p:nvSpPr>
+        <p:spPr>
+          <a:xfrm>
+            <a:off x="548640" y="2743200"/>
+            <a:ext cx="11064240" cy="1371600"/>
+          </a:xfrm>
+          <a:prstGeom prst="rect">
+            <a:avLst/>
+          </a:prstGeom>
+          <a:noFill/>
+        </p:spPr>
+        <p:txBody>
+          <a:bodyPr wrap="square">
+            <a:noAutofit/>
+          </a:bodyPr>
+          <a:lstStyle/>
+          <a:p>
+            <a:pPr algn="ctr">
+              <a:lnSpc>
+                <a:spcPts val="2200"/>
+              </a:lnSpc>
+              <a:defRPr sz="3600" b="1">
+                <a:solidFill>
+                  <a:srgbClr val="1A1A2E"/>
+                </a:solidFill>
+                <a:latin typeface="Calibri"/>
+              </a:defRPr>
+            </a:pPr>
+            <a:r>
+              <a:t>Key concepts</a:t>
+            </a:r>
+          </a:p>
+        </p:txBody>
+      </p:sp>
+      <p:sp>
+        <p:nvSpPr>
+          <p:cNvPr id="3" name="TextBox 2"/>
+          <p:cNvSpPr txBox="1"/>
+          <p:nvPr/>
+        </p:nvSpPr>
+        <p:spPr>
+          <a:xfrm>
+            <a:off x="548640" y="6355080"/>
+            <a:ext cx="11064240" cy="320040"/>
+          </a:xfrm>
+          <a:prstGeom prst="rect">
+            <a:avLst/>
+          </a:prstGeom>
+          <a:noFill/>
+        </p:spPr>
+        <p:txBody>
+          <a:bodyPr wrap="square">
+            <a:noAutofit/>
+          </a:bodyPr>
+          <a:lstStyle/>
+          <a:p>
+            <a:pPr algn="r">
+              <a:lnSpc>
+                <a:spcPts val="2200"/>
+              </a:lnSpc>
+              <a:defRPr sz="1000" b="0">
+                <a:solidFill>
+                  <a:srgbClr val="666666"/>
+                </a:solidFill>
+                <a:latin typeface="Calibri"/>
+              </a:defRPr>
+            </a:pPr>
+            <a:r>
+              <a:t>learn_uart_spi_i2c / Module 6</a:t>
+            </a:r>
+          </a:p>
+        </p:txBody>
+      </p:sp>
+    </p:spTree>
+  </p:cSld>
+  <p:clrMapOvr>
+    <a:masterClrMapping/>
+  </p:clrMapOvr>
+</p:sld>
+</file>
+
+<file path=ppt/slides/slide33.xml><?xml version="1.0" encoding="utf-8"?>
+<p:sld xmlns:a="http://schemas.openxmlformats.org/drawingml/2006/main" xmlns:p="http://schemas.openxmlformats.org/presentationml/2006/main" xmlns:r="http://schemas.openxmlformats.org/officeDocument/2006/relationships">
+  <p:cSld>
+    <p:spTree>
+      <p:nvGrpSpPr>
+        <p:cNvPr id="1" name=""/>
+        <p:cNvGrpSpPr/>
+        <p:nvPr/>
+      </p:nvGrpSpPr>
+      <p:grpSpPr/>
+      <p:sp>
+        <p:nvSpPr>
+          <p:cNvPr id="2" name="TextBox 1"/>
+          <p:cNvSpPr txBox="1"/>
+          <p:nvPr/>
+        </p:nvSpPr>
+        <p:spPr>
+          <a:xfrm>
+            <a:off x="548640" y="411480"/>
+            <a:ext cx="11064240" cy="777240"/>
+          </a:xfrm>
+          <a:prstGeom prst="rect">
+            <a:avLst/>
+          </a:prstGeom>
+          <a:noFill/>
+        </p:spPr>
+        <p:txBody>
+          <a:bodyPr wrap="square">
+            <a:noAutofit/>
+          </a:bodyPr>
+          <a:lstStyle/>
+          <a:p>
+            <a:pPr>
+              <a:lnSpc>
+                <a:spcPts val="2200"/>
+              </a:lnSpc>
+              <a:defRPr sz="2800" b="1">
+                <a:solidFill>
+                  <a:srgbClr val="1A1A2E"/>
+                </a:solidFill>
+                <a:latin typeface="Calibri"/>
+              </a:defRPr>
+            </a:pPr>
+            <a:r>
+              <a:t>1. Bus-centric verification</a:t>
+            </a:r>
+          </a:p>
+        </p:txBody>
+      </p:sp>
+      <p:sp>
+        <p:nvSpPr>
+          <p:cNvPr id="3" name="TextBox 2"/>
+          <p:cNvSpPr txBox="1"/>
+          <p:nvPr/>
+        </p:nvSpPr>
+        <p:spPr>
+          <a:xfrm>
+            <a:off x="548640" y="1234440"/>
+            <a:ext cx="11064240" cy="4937760"/>
+          </a:xfrm>
+          <a:prstGeom prst="rect">
+            <a:avLst/>
+          </a:prstGeom>
+          <a:noFill/>
+        </p:spPr>
+        <p:txBody>
+          <a:bodyPr wrap="square">
+            <a:noAutofit/>
+          </a:bodyPr>
+          <a:lstStyle/>
+          <a:p>
+            <a:pPr>
+              <a:lnSpc>
+                <a:spcPts val="2200"/>
+              </a:lnSpc>
+              <a:spcAft>
                 <a:spcPts val="1000"/>
               </a:spcAft>
               <a:defRPr sz="2000" b="0">
@@ -8377,7 +10048,7 @@
               </a:defRPr>
             </a:pPr>
             <a:r>
-              <a:t>• Extend SPI verification to **UVM+SV** — SPI agent</a:t>
+              <a:t>• Monitor rebuilds the byte from SCLK/MOSI/CS_N, not</a:t>
             </a:r>
           </a:p>
           <a:p>
@@ -8396,9 +10067,128 @@
               </a:defRPr>
             </a:pPr>
             <a:r>
-              <a:t>      (transaction, sequence, driver, monitor, scoreboa…</a:t>
-            </a:r>
-          </a:p>
+              <a:t>      only the DUT status flag.</a:t>
+            </a:r>
+          </a:p>
+        </p:txBody>
+      </p:sp>
+      <p:sp>
+        <p:nvSpPr>
+          <p:cNvPr id="4" name="TextBox 3"/>
+          <p:cNvSpPr txBox="1"/>
+          <p:nvPr/>
+        </p:nvSpPr>
+        <p:spPr>
+          <a:xfrm>
+            <a:off x="548640" y="6355080"/>
+            <a:ext cx="11064240" cy="320040"/>
+          </a:xfrm>
+          <a:prstGeom prst="rect">
+            <a:avLst/>
+          </a:prstGeom>
+          <a:noFill/>
+        </p:spPr>
+        <p:txBody>
+          <a:bodyPr wrap="square">
+            <a:noAutofit/>
+          </a:bodyPr>
+          <a:lstStyle/>
+          <a:p>
+            <a:pPr algn="r">
+              <a:lnSpc>
+                <a:spcPts val="2200"/>
+              </a:lnSpc>
+              <a:defRPr sz="1000" b="0">
+                <a:solidFill>
+                  <a:srgbClr val="666666"/>
+                </a:solidFill>
+                <a:latin typeface="Calibri"/>
+              </a:defRPr>
+            </a:pPr>
+            <a:r>
+              <a:t>learn_uart_spi_i2c / Module 6</a:t>
+            </a:r>
+          </a:p>
+        </p:txBody>
+      </p:sp>
+    </p:spTree>
+  </p:cSld>
+  <p:clrMapOvr>
+    <a:masterClrMapping/>
+  </p:clrMapOvr>
+</p:sld>
+</file>
+
+<file path=ppt/slides/slide34.xml><?xml version="1.0" encoding="utf-8"?>
+<p:sld xmlns:a="http://schemas.openxmlformats.org/drawingml/2006/main" xmlns:p="http://schemas.openxmlformats.org/presentationml/2006/main" xmlns:r="http://schemas.openxmlformats.org/officeDocument/2006/relationships">
+  <p:cSld>
+    <p:spTree>
+      <p:nvGrpSpPr>
+        <p:cNvPr id="1" name=""/>
+        <p:cNvGrpSpPr/>
+        <p:nvPr/>
+      </p:nvGrpSpPr>
+      <p:grpSpPr/>
+      <p:sp>
+        <p:nvSpPr>
+          <p:cNvPr id="2" name="TextBox 1"/>
+          <p:cNvSpPr txBox="1"/>
+          <p:nvPr/>
+        </p:nvSpPr>
+        <p:spPr>
+          <a:xfrm>
+            <a:off x="548640" y="411480"/>
+            <a:ext cx="11064240" cy="777240"/>
+          </a:xfrm>
+          <a:prstGeom prst="rect">
+            <a:avLst/>
+          </a:prstGeom>
+          <a:noFill/>
+        </p:spPr>
+        <p:txBody>
+          <a:bodyPr wrap="square">
+            <a:noAutofit/>
+          </a:bodyPr>
+          <a:lstStyle/>
+          <a:p>
+            <a:pPr>
+              <a:lnSpc>
+                <a:spcPts val="2200"/>
+              </a:lnSpc>
+              <a:defRPr sz="2800" b="1">
+                <a:solidFill>
+                  <a:srgbClr val="1A1A2E"/>
+                </a:solidFill>
+                <a:latin typeface="Calibri"/>
+              </a:defRPr>
+            </a:pPr>
+            <a:r>
+              <a:t>2. Mode 0 in the monitor</a:t>
+            </a:r>
+          </a:p>
+        </p:txBody>
+      </p:sp>
+      <p:sp>
+        <p:nvSpPr>
+          <p:cNvPr id="3" name="TextBox 2"/>
+          <p:cNvSpPr txBox="1"/>
+          <p:nvPr/>
+        </p:nvSpPr>
+        <p:spPr>
+          <a:xfrm>
+            <a:off x="548640" y="1234440"/>
+            <a:ext cx="11064240" cy="4937760"/>
+          </a:xfrm>
+          <a:prstGeom prst="rect">
+            <a:avLst/>
+          </a:prstGeom>
+          <a:noFill/>
+        </p:spPr>
+        <p:txBody>
+          <a:bodyPr wrap="square">
+            <a:noAutofit/>
+          </a:bodyPr>
+          <a:lstStyle/>
           <a:p>
             <a:pPr>
               <a:lnSpc>
@@ -8415,7 +10205,7 @@
               </a:defRPr>
             </a:pPr>
             <a:r>
-              <a:t>• Complete module6/CHECKLIST.md</a:t>
+              <a:t>• Wait for `cs_n` low, then 8 rising edges, MSB first</a:t>
             </a:r>
           </a:p>
           <a:p>
@@ -8434,9 +10224,224 @@
               </a:defRPr>
             </a:pPr>
             <a:r>
-              <a:t>• Review module6/EXAMPLES.md and run each lab</a:t>
-            </a:r>
-          </a:p>
+              <a:t>      into `observed_mosi`.</a:t>
+            </a:r>
+          </a:p>
+        </p:txBody>
+      </p:sp>
+      <p:sp>
+        <p:nvSpPr>
+          <p:cNvPr id="4" name="TextBox 3"/>
+          <p:cNvSpPr txBox="1"/>
+          <p:nvPr/>
+        </p:nvSpPr>
+        <p:spPr>
+          <a:xfrm>
+            <a:off x="548640" y="6355080"/>
+            <a:ext cx="11064240" cy="320040"/>
+          </a:xfrm>
+          <a:prstGeom prst="rect">
+            <a:avLst/>
+          </a:prstGeom>
+          <a:noFill/>
+        </p:spPr>
+        <p:txBody>
+          <a:bodyPr wrap="square">
+            <a:noAutofit/>
+          </a:bodyPr>
+          <a:lstStyle/>
+          <a:p>
+            <a:pPr algn="r">
+              <a:lnSpc>
+                <a:spcPts val="2200"/>
+              </a:lnSpc>
+              <a:defRPr sz="1000" b="0">
+                <a:solidFill>
+                  <a:srgbClr val="666666"/>
+                </a:solidFill>
+                <a:latin typeface="Calibri"/>
+              </a:defRPr>
+            </a:pPr>
+            <a:r>
+              <a:t>learn_uart_spi_i2c / Module 6</a:t>
+            </a:r>
+          </a:p>
+        </p:txBody>
+      </p:sp>
+    </p:spTree>
+  </p:cSld>
+  <p:clrMapOvr>
+    <a:masterClrMapping/>
+  </p:clrMapOvr>
+</p:sld>
+</file>
+
+<file path=ppt/slides/slide35.xml><?xml version="1.0" encoding="utf-8"?>
+<p:sld xmlns:a="http://schemas.openxmlformats.org/drawingml/2006/main" xmlns:p="http://schemas.openxmlformats.org/presentationml/2006/main" xmlns:r="http://schemas.openxmlformats.org/officeDocument/2006/relationships">
+  <p:cSld>
+    <p:spTree>
+      <p:nvGrpSpPr>
+        <p:cNvPr id="1" name=""/>
+        <p:cNvGrpSpPr/>
+        <p:nvPr/>
+      </p:nvGrpSpPr>
+      <p:grpSpPr/>
+      <p:sp>
+        <p:nvSpPr>
+          <p:cNvPr id="2" name="TextBox 1"/>
+          <p:cNvSpPr txBox="1"/>
+          <p:nvPr/>
+        </p:nvSpPr>
+        <p:spPr>
+          <a:xfrm>
+            <a:off x="548640" y="2743200"/>
+            <a:ext cx="11064240" cy="1371600"/>
+          </a:xfrm>
+          <a:prstGeom prst="rect">
+            <a:avLst/>
+          </a:prstGeom>
+          <a:noFill/>
+        </p:spPr>
+        <p:txBody>
+          <a:bodyPr wrap="square">
+            <a:noAutofit/>
+          </a:bodyPr>
+          <a:lstStyle/>
+          <a:p>
+            <a:pPr algn="ctr">
+              <a:lnSpc>
+                <a:spcPts val="2200"/>
+              </a:lnSpc>
+              <a:defRPr sz="3600" b="1">
+                <a:solidFill>
+                  <a:srgbClr val="1A1A2E"/>
+                </a:solidFill>
+                <a:latin typeface="Calibri"/>
+              </a:defRPr>
+            </a:pPr>
+            <a:r>
+              <a:t>Common pitfalls</a:t>
+            </a:r>
+          </a:p>
+        </p:txBody>
+      </p:sp>
+      <p:sp>
+        <p:nvSpPr>
+          <p:cNvPr id="3" name="TextBox 2"/>
+          <p:cNvSpPr txBox="1"/>
+          <p:nvPr/>
+        </p:nvSpPr>
+        <p:spPr>
+          <a:xfrm>
+            <a:off x="548640" y="6355080"/>
+            <a:ext cx="11064240" cy="320040"/>
+          </a:xfrm>
+          <a:prstGeom prst="rect">
+            <a:avLst/>
+          </a:prstGeom>
+          <a:noFill/>
+        </p:spPr>
+        <p:txBody>
+          <a:bodyPr wrap="square">
+            <a:noAutofit/>
+          </a:bodyPr>
+          <a:lstStyle/>
+          <a:p>
+            <a:pPr algn="r">
+              <a:lnSpc>
+                <a:spcPts val="2200"/>
+              </a:lnSpc>
+              <a:defRPr sz="1000" b="0">
+                <a:solidFill>
+                  <a:srgbClr val="666666"/>
+                </a:solidFill>
+                <a:latin typeface="Calibri"/>
+              </a:defRPr>
+            </a:pPr>
+            <a:r>
+              <a:t>learn_uart_spi_i2c / Module 6</a:t>
+            </a:r>
+          </a:p>
+        </p:txBody>
+      </p:sp>
+    </p:spTree>
+  </p:cSld>
+  <p:clrMapOvr>
+    <a:masterClrMapping/>
+  </p:clrMapOvr>
+</p:sld>
+</file>
+
+<file path=ppt/slides/slide36.xml><?xml version="1.0" encoding="utf-8"?>
+<p:sld xmlns:a="http://schemas.openxmlformats.org/drawingml/2006/main" xmlns:p="http://schemas.openxmlformats.org/presentationml/2006/main" xmlns:r="http://schemas.openxmlformats.org/officeDocument/2006/relationships">
+  <p:cSld>
+    <p:spTree>
+      <p:nvGrpSpPr>
+        <p:cNvPr id="1" name=""/>
+        <p:cNvGrpSpPr/>
+        <p:nvPr/>
+      </p:nvGrpSpPr>
+      <p:grpSpPr/>
+      <p:sp>
+        <p:nvSpPr>
+          <p:cNvPr id="2" name="TextBox 1"/>
+          <p:cNvSpPr txBox="1"/>
+          <p:nvPr/>
+        </p:nvSpPr>
+        <p:spPr>
+          <a:xfrm>
+            <a:off x="548640" y="411480"/>
+            <a:ext cx="11064240" cy="777240"/>
+          </a:xfrm>
+          <a:prstGeom prst="rect">
+            <a:avLst/>
+          </a:prstGeom>
+          <a:noFill/>
+        </p:spPr>
+        <p:txBody>
+          <a:bodyPr wrap="square">
+            <a:noAutofit/>
+          </a:bodyPr>
+          <a:lstStyle/>
+          <a:p>
+            <a:pPr>
+              <a:lnSpc>
+                <a:spcPts val="2200"/>
+              </a:lnSpc>
+              <a:defRPr sz="2800" b="1">
+                <a:solidFill>
+                  <a:srgbClr val="1A1A2E"/>
+                </a:solidFill>
+                <a:latin typeface="Calibri"/>
+              </a:defRPr>
+            </a:pPr>
+            <a:r>
+              <a:t>Sampling MOSI on wrong edge</a:t>
+            </a:r>
+          </a:p>
+        </p:txBody>
+      </p:sp>
+      <p:sp>
+        <p:nvSpPr>
+          <p:cNvPr id="3" name="TextBox 2"/>
+          <p:cNvSpPr txBox="1"/>
+          <p:nvPr/>
+        </p:nvSpPr>
+        <p:spPr>
+          <a:xfrm>
+            <a:off x="548640" y="1234440"/>
+            <a:ext cx="11064240" cy="4937760"/>
+          </a:xfrm>
+          <a:prstGeom prst="rect">
+            <a:avLst/>
+          </a:prstGeom>
+          <a:noFill/>
+        </p:spPr>
+        <p:txBody>
+          <a:bodyPr wrap="square">
+            <a:noAutofit/>
+          </a:bodyPr>
+          <a:lstStyle/>
           <a:p>
             <a:pPr>
               <a:lnSpc>
@@ -8453,7 +10458,550 @@
               </a:defRPr>
             </a:pPr>
             <a:r>
-              <a:t>• Next: I²C</a:t>
+              <a:t>• Mistake: Using falling SCLK for Mode 0 capture.</a:t>
+            </a:r>
+          </a:p>
+          <a:p>
+            <a:pPr>
+              <a:lnSpc>
+                <a:spcPts val="2200"/>
+              </a:lnSpc>
+              <a:spcAft>
+                <a:spcPts val="1000"/>
+              </a:spcAft>
+              <a:defRPr sz="2000" b="0">
+                <a:solidFill>
+                  <a:srgbClr val="333333"/>
+                </a:solidFill>
+                <a:latin typeface="Calibri"/>
+              </a:defRPr>
+            </a:pPr>
+            <a:r>
+              <a:t>• Correct: Rising-edge samples in SpiMonitor.</a:t>
+            </a:r>
+          </a:p>
+          <a:p>
+            <a:pPr>
+              <a:lnSpc>
+                <a:spcPts val="2200"/>
+              </a:lnSpc>
+              <a:spcAft>
+                <a:spcPts val="1000"/>
+              </a:spcAft>
+              <a:defRPr sz="2000" b="0">
+                <a:solidFill>
+                  <a:srgbClr val="333333"/>
+                </a:solidFill>
+                <a:latin typeface="Calibri"/>
+              </a:defRPr>
+            </a:pPr>
+            <a:r>
+              <a:t>• Why: Scoreboard mismatches even when `done` pulses.</a:t>
+            </a:r>
+          </a:p>
+        </p:txBody>
+      </p:sp>
+      <p:sp>
+        <p:nvSpPr>
+          <p:cNvPr id="4" name="TextBox 3"/>
+          <p:cNvSpPr txBox="1"/>
+          <p:nvPr/>
+        </p:nvSpPr>
+        <p:spPr>
+          <a:xfrm>
+            <a:off x="548640" y="6355080"/>
+            <a:ext cx="11064240" cy="320040"/>
+          </a:xfrm>
+          <a:prstGeom prst="rect">
+            <a:avLst/>
+          </a:prstGeom>
+          <a:noFill/>
+        </p:spPr>
+        <p:txBody>
+          <a:bodyPr wrap="square">
+            <a:noAutofit/>
+          </a:bodyPr>
+          <a:lstStyle/>
+          <a:p>
+            <a:pPr algn="r">
+              <a:lnSpc>
+                <a:spcPts val="2200"/>
+              </a:lnSpc>
+              <a:defRPr sz="1000" b="0">
+                <a:solidFill>
+                  <a:srgbClr val="666666"/>
+                </a:solidFill>
+                <a:latin typeface="Calibri"/>
+              </a:defRPr>
+            </a:pPr>
+            <a:r>
+              <a:t>learn_uart_spi_i2c / Module 6</a:t>
+            </a:r>
+          </a:p>
+        </p:txBody>
+      </p:sp>
+    </p:spTree>
+  </p:cSld>
+  <p:clrMapOvr>
+    <a:masterClrMapping/>
+  </p:clrMapOvr>
+</p:sld>
+</file>
+
+<file path=ppt/slides/slide37.xml><?xml version="1.0" encoding="utf-8"?>
+<p:sld xmlns:a="http://schemas.openxmlformats.org/drawingml/2006/main" xmlns:p="http://schemas.openxmlformats.org/presentationml/2006/main" xmlns:r="http://schemas.openxmlformats.org/officeDocument/2006/relationships">
+  <p:cSld>
+    <p:spTree>
+      <p:nvGrpSpPr>
+        <p:cNvPr id="1" name=""/>
+        <p:cNvGrpSpPr/>
+        <p:nvPr/>
+      </p:nvGrpSpPr>
+      <p:grpSpPr/>
+      <p:sp>
+        <p:nvSpPr>
+          <p:cNvPr id="2" name="TextBox 1"/>
+          <p:cNvSpPr txBox="1"/>
+          <p:nvPr/>
+        </p:nvSpPr>
+        <p:spPr>
+          <a:xfrm>
+            <a:off x="548640" y="411480"/>
+            <a:ext cx="11064240" cy="777240"/>
+          </a:xfrm>
+          <a:prstGeom prst="rect">
+            <a:avLst/>
+          </a:prstGeom>
+          <a:noFill/>
+        </p:spPr>
+        <p:txBody>
+          <a:bodyPr wrap="square">
+            <a:noAutofit/>
+          </a:bodyPr>
+          <a:lstStyle/>
+          <a:p>
+            <a:pPr>
+              <a:lnSpc>
+                <a:spcPts val="2200"/>
+              </a:lnSpc>
+              <a:defRPr sz="2800" b="1">
+                <a:solidFill>
+                  <a:srgbClr val="1A1A2E"/>
+                </a:solidFill>
+                <a:latin typeface="Calibri"/>
+              </a:defRPr>
+            </a:pPr>
+            <a:r>
+              <a:t>Ignoring CS framing</a:t>
+            </a:r>
+          </a:p>
+        </p:txBody>
+      </p:sp>
+      <p:sp>
+        <p:nvSpPr>
+          <p:cNvPr id="3" name="TextBox 2"/>
+          <p:cNvSpPr txBox="1"/>
+          <p:nvPr/>
+        </p:nvSpPr>
+        <p:spPr>
+          <a:xfrm>
+            <a:off x="548640" y="1234440"/>
+            <a:ext cx="11064240" cy="4937760"/>
+          </a:xfrm>
+          <a:prstGeom prst="rect">
+            <a:avLst/>
+          </a:prstGeom>
+          <a:noFill/>
+        </p:spPr>
+        <p:txBody>
+          <a:bodyPr wrap="square">
+            <a:noAutofit/>
+          </a:bodyPr>
+          <a:lstStyle/>
+          <a:p>
+            <a:pPr>
+              <a:lnSpc>
+                <a:spcPts val="2200"/>
+              </a:lnSpc>
+              <a:spcAft>
+                <a:spcPts val="1000"/>
+              </a:spcAft>
+              <a:defRPr sz="2000" b="0">
+                <a:solidFill>
+                  <a:srgbClr val="333333"/>
+                </a:solidFill>
+                <a:latin typeface="Calibri"/>
+              </a:defRPr>
+            </a:pPr>
+            <a:r>
+              <a:t>• Mistake: Counting SCLK edges across multiple frames.</a:t>
+            </a:r>
+          </a:p>
+          <a:p>
+            <a:pPr>
+              <a:lnSpc>
+                <a:spcPts val="2200"/>
+              </a:lnSpc>
+              <a:spcAft>
+                <a:spcPts val="1000"/>
+              </a:spcAft>
+              <a:defRPr sz="2000" b="0">
+                <a:solidFill>
+                  <a:srgbClr val="333333"/>
+                </a:solidFill>
+                <a:latin typeface="Calibri"/>
+              </a:defRPr>
+            </a:pPr>
+            <a:r>
+              <a:t>• Correct: Reset bit index when `cs_n` deasserts and a</a:t>
+            </a:r>
+          </a:p>
+          <a:p>
+            <a:pPr>
+              <a:lnSpc>
+                <a:spcPts val="2200"/>
+              </a:lnSpc>
+              <a:spcAft>
+                <a:spcPts val="1000"/>
+              </a:spcAft>
+              <a:defRPr sz="2000" b="0">
+                <a:solidFill>
+                  <a:srgbClr val="333333"/>
+                </a:solidFill>
+                <a:latin typeface="Calibri"/>
+              </a:defRPr>
+            </a:pPr>
+            <a:r>
+              <a:t>      new frame starts.</a:t>
+            </a:r>
+          </a:p>
+          <a:p>
+            <a:pPr>
+              <a:lnSpc>
+                <a:spcPts val="2200"/>
+              </a:lnSpc>
+              <a:spcAft>
+                <a:spcPts val="1000"/>
+              </a:spcAft>
+              <a:defRPr sz="2000" b="0">
+                <a:solidFill>
+                  <a:srgbClr val="333333"/>
+                </a:solidFill>
+                <a:latin typeface="Calibri"/>
+              </a:defRPr>
+            </a:pPr>
+            <a:r>
+              <a:t>• Why: Bytes merge or split incorrectly.</a:t>
+            </a:r>
+          </a:p>
+        </p:txBody>
+      </p:sp>
+      <p:sp>
+        <p:nvSpPr>
+          <p:cNvPr id="4" name="TextBox 3"/>
+          <p:cNvSpPr txBox="1"/>
+          <p:nvPr/>
+        </p:nvSpPr>
+        <p:spPr>
+          <a:xfrm>
+            <a:off x="548640" y="6355080"/>
+            <a:ext cx="11064240" cy="320040"/>
+          </a:xfrm>
+          <a:prstGeom prst="rect">
+            <a:avLst/>
+          </a:prstGeom>
+          <a:noFill/>
+        </p:spPr>
+        <p:txBody>
+          <a:bodyPr wrap="square">
+            <a:noAutofit/>
+          </a:bodyPr>
+          <a:lstStyle/>
+          <a:p>
+            <a:pPr algn="r">
+              <a:lnSpc>
+                <a:spcPts val="2200"/>
+              </a:lnSpc>
+              <a:defRPr sz="1000" b="0">
+                <a:solidFill>
+                  <a:srgbClr val="666666"/>
+                </a:solidFill>
+                <a:latin typeface="Calibri"/>
+              </a:defRPr>
+            </a:pPr>
+            <a:r>
+              <a:t>learn_uart_spi_i2c / Module 6</a:t>
+            </a:r>
+          </a:p>
+        </p:txBody>
+      </p:sp>
+    </p:spTree>
+  </p:cSld>
+  <p:clrMapOvr>
+    <a:masterClrMapping/>
+  </p:clrMapOvr>
+</p:sld>
+</file>
+
+<file path=ppt/slides/slide38.xml><?xml version="1.0" encoding="utf-8"?>
+<p:sld xmlns:a="http://schemas.openxmlformats.org/drawingml/2006/main" xmlns:p="http://schemas.openxmlformats.org/presentationml/2006/main" xmlns:r="http://schemas.openxmlformats.org/officeDocument/2006/relationships">
+  <p:cSld>
+    <p:spTree>
+      <p:nvGrpSpPr>
+        <p:cNvPr id="1" name=""/>
+        <p:cNvGrpSpPr/>
+        <p:nvPr/>
+      </p:nvGrpSpPr>
+      <p:grpSpPr/>
+      <p:sp>
+        <p:nvSpPr>
+          <p:cNvPr id="2" name="TextBox 1"/>
+          <p:cNvSpPr txBox="1"/>
+          <p:nvPr/>
+        </p:nvSpPr>
+        <p:spPr>
+          <a:xfrm>
+            <a:off x="548640" y="2743200"/>
+            <a:ext cx="11064240" cy="1371600"/>
+          </a:xfrm>
+          <a:prstGeom prst="rect">
+            <a:avLst/>
+          </a:prstGeom>
+          <a:noFill/>
+        </p:spPr>
+        <p:txBody>
+          <a:bodyPr wrap="square">
+            <a:noAutofit/>
+          </a:bodyPr>
+          <a:lstStyle/>
+          <a:p>
+            <a:pPr algn="ctr">
+              <a:lnSpc>
+                <a:spcPts val="2200"/>
+              </a:lnSpc>
+              <a:defRPr sz="3600" b="1">
+                <a:solidFill>
+                  <a:srgbClr val="1A1A2E"/>
+                </a:solidFill>
+                <a:latin typeface="Calibri"/>
+              </a:defRPr>
+            </a:pPr>
+            <a:r>
+              <a:t>Practice &amp; assessment</a:t>
+            </a:r>
+          </a:p>
+        </p:txBody>
+      </p:sp>
+      <p:sp>
+        <p:nvSpPr>
+          <p:cNvPr id="3" name="TextBox 2"/>
+          <p:cNvSpPr txBox="1"/>
+          <p:nvPr/>
+        </p:nvSpPr>
+        <p:spPr>
+          <a:xfrm>
+            <a:off x="548640" y="6355080"/>
+            <a:ext cx="11064240" cy="320040"/>
+          </a:xfrm>
+          <a:prstGeom prst="rect">
+            <a:avLst/>
+          </a:prstGeom>
+          <a:noFill/>
+        </p:spPr>
+        <p:txBody>
+          <a:bodyPr wrap="square">
+            <a:noAutofit/>
+          </a:bodyPr>
+          <a:lstStyle/>
+          <a:p>
+            <a:pPr algn="r">
+              <a:lnSpc>
+                <a:spcPts val="2200"/>
+              </a:lnSpc>
+              <a:defRPr sz="1000" b="0">
+                <a:solidFill>
+                  <a:srgbClr val="666666"/>
+                </a:solidFill>
+                <a:latin typeface="Calibri"/>
+              </a:defRPr>
+            </a:pPr>
+            <a:r>
+              <a:t>learn_uart_spi_i2c / Module 6</a:t>
+            </a:r>
+          </a:p>
+        </p:txBody>
+      </p:sp>
+    </p:spTree>
+  </p:cSld>
+  <p:clrMapOvr>
+    <a:masterClrMapping/>
+  </p:clrMapOvr>
+</p:sld>
+</file>
+
+<file path=ppt/slides/slide39.xml><?xml version="1.0" encoding="utf-8"?>
+<p:sld xmlns:a="http://schemas.openxmlformats.org/drawingml/2006/main" xmlns:p="http://schemas.openxmlformats.org/presentationml/2006/main" xmlns:r="http://schemas.openxmlformats.org/officeDocument/2006/relationships">
+  <p:cSld>
+    <p:spTree>
+      <p:nvGrpSpPr>
+        <p:cNvPr id="1" name=""/>
+        <p:cNvGrpSpPr/>
+        <p:nvPr/>
+      </p:nvGrpSpPr>
+      <p:grpSpPr/>
+      <p:sp>
+        <p:nvSpPr>
+          <p:cNvPr id="2" name="TextBox 1"/>
+          <p:cNvSpPr txBox="1"/>
+          <p:nvPr/>
+        </p:nvSpPr>
+        <p:spPr>
+          <a:xfrm>
+            <a:off x="548640" y="411480"/>
+            <a:ext cx="11064240" cy="777240"/>
+          </a:xfrm>
+          <a:prstGeom prst="rect">
+            <a:avLst/>
+          </a:prstGeom>
+          <a:noFill/>
+        </p:spPr>
+        <p:txBody>
+          <a:bodyPr wrap="square">
+            <a:noAutofit/>
+          </a:bodyPr>
+          <a:lstStyle/>
+          <a:p>
+            <a:pPr>
+              <a:lnSpc>
+                <a:spcPts val="2200"/>
+              </a:lnSpc>
+              <a:defRPr sz="2800" b="1">
+                <a:solidFill>
+                  <a:srgbClr val="1A1A2E"/>
+                </a:solidFill>
+                <a:latin typeface="Calibri"/>
+              </a:defRPr>
+            </a:pPr>
+            <a:r>
+              <a:t>What you should know</a:t>
+            </a:r>
+          </a:p>
+        </p:txBody>
+      </p:sp>
+      <p:sp>
+        <p:nvSpPr>
+          <p:cNvPr id="3" name="TextBox 2"/>
+          <p:cNvSpPr txBox="1"/>
+          <p:nvPr/>
+        </p:nvSpPr>
+        <p:spPr>
+          <a:xfrm>
+            <a:off x="548640" y="1234440"/>
+            <a:ext cx="11064240" cy="4937760"/>
+          </a:xfrm>
+          <a:prstGeom prst="rect">
+            <a:avLst/>
+          </a:prstGeom>
+          <a:noFill/>
+        </p:spPr>
+        <p:txBody>
+          <a:bodyPr wrap="square">
+            <a:noAutofit/>
+          </a:bodyPr>
+          <a:lstStyle/>
+          <a:p>
+            <a:pPr>
+              <a:lnSpc>
+                <a:spcPts val="2200"/>
+              </a:lnSpc>
+              <a:spcAft>
+                <a:spcPts val="1000"/>
+              </a:spcAft>
+              <a:defRPr sz="2000" b="0">
+                <a:solidFill>
+                  <a:srgbClr val="333333"/>
+                </a:solidFill>
+                <a:latin typeface="Calibri"/>
+              </a:defRPr>
+            </a:pPr>
+            <a:r>
+              <a:t>• Describe the SPI UVM agent (transaction, sequence,</a:t>
+            </a:r>
+          </a:p>
+          <a:p>
+            <a:pPr>
+              <a:lnSpc>
+                <a:spcPts val="2200"/>
+              </a:lnSpc>
+              <a:spcAft>
+                <a:spcPts val="1000"/>
+              </a:spcAft>
+              <a:defRPr sz="2000" b="0">
+                <a:solidFill>
+                  <a:srgbClr val="333333"/>
+                </a:solidFill>
+                <a:latin typeface="Calibri"/>
+              </a:defRPr>
+            </a:pPr>
+            <a:r>
+              <a:t>      driver, monitor, scoreboard) and mode 0 monitori…</a:t>
+            </a:r>
+          </a:p>
+          <a:p>
+            <a:pPr>
+              <a:lnSpc>
+                <a:spcPts val="2200"/>
+              </a:lnSpc>
+              <a:spcAft>
+                <a:spcPts val="1000"/>
+              </a:spcAft>
+              <a:defRPr sz="2000" b="0">
+                <a:solidFill>
+                  <a:srgbClr val="333333"/>
+                </a:solidFill>
+                <a:latin typeface="Calibri"/>
+              </a:defRPr>
+            </a:pPr>
+            <a:r>
+              <a:t>• Run spi_uvm and interpret UVM output.</a:t>
+            </a:r>
+          </a:p>
+          <a:p>
+            <a:pPr>
+              <a:lnSpc>
+                <a:spcPts val="2200"/>
+              </a:lnSpc>
+              <a:spcAft>
+                <a:spcPts val="1000"/>
+              </a:spcAft>
+              <a:defRPr sz="2000" b="0">
+                <a:solidFill>
+                  <a:srgbClr val="333333"/>
+                </a:solidFill>
+                <a:latin typeface="Calibri"/>
+              </a:defRPr>
+            </a:pPr>
+            <a:r>
+              <a:t>• Ready for Module 7: I²C protocol + RTL + basic</a:t>
+            </a:r>
+          </a:p>
+          <a:p>
+            <a:pPr>
+              <a:lnSpc>
+                <a:spcPts val="2200"/>
+              </a:lnSpc>
+              <a:spcAft>
+                <a:spcPts val="1000"/>
+              </a:spcAft>
+              <a:defRPr sz="2000" b="0">
+                <a:solidFill>
+                  <a:srgbClr val="333333"/>
+                </a:solidFill>
+                <a:latin typeface="Calibri"/>
+              </a:defRPr>
+            </a:pPr>
+            <a:r>
+              <a:t>      testbench.</a:t>
             </a:r>
           </a:p>
         </p:txBody>
@@ -8664,6 +11212,629 @@
 </p:sld>
 </file>
 
+<file path=ppt/slides/slide40.xml><?xml version="1.0" encoding="utf-8"?>
+<p:sld xmlns:a="http://schemas.openxmlformats.org/drawingml/2006/main" xmlns:p="http://schemas.openxmlformats.org/presentationml/2006/main" xmlns:r="http://schemas.openxmlformats.org/officeDocument/2006/relationships">
+  <p:cSld>
+    <p:spTree>
+      <p:nvGrpSpPr>
+        <p:cNvPr id="1" name=""/>
+        <p:cNvGrpSpPr/>
+        <p:nvPr/>
+      </p:nvGrpSpPr>
+      <p:grpSpPr/>
+      <p:sp>
+        <p:nvSpPr>
+          <p:cNvPr id="2" name="TextBox 1"/>
+          <p:cNvSpPr txBox="1"/>
+          <p:nvPr/>
+        </p:nvSpPr>
+        <p:spPr>
+          <a:xfrm>
+            <a:off x="548640" y="411480"/>
+            <a:ext cx="11064240" cy="777240"/>
+          </a:xfrm>
+          <a:prstGeom prst="rect">
+            <a:avLst/>
+          </a:prstGeom>
+          <a:noFill/>
+        </p:spPr>
+        <p:txBody>
+          <a:bodyPr wrap="square">
+            <a:noAutofit/>
+          </a:bodyPr>
+          <a:lstStyle/>
+          <a:p>
+            <a:pPr>
+              <a:lnSpc>
+                <a:spcPts val="2200"/>
+              </a:lnSpc>
+              <a:defRPr sz="2800" b="1">
+                <a:solidFill>
+                  <a:srgbClr val="1A1A2E"/>
+                </a:solidFill>
+                <a:latin typeface="Calibri"/>
+              </a:defRPr>
+            </a:pPr>
+            <a:r>
+              <a:t>Exercises</a:t>
+            </a:r>
+          </a:p>
+        </p:txBody>
+      </p:sp>
+      <p:sp>
+        <p:nvSpPr>
+          <p:cNvPr id="3" name="TextBox 2"/>
+          <p:cNvSpPr txBox="1"/>
+          <p:nvPr/>
+        </p:nvSpPr>
+        <p:spPr>
+          <a:xfrm>
+            <a:off x="548640" y="1234440"/>
+            <a:ext cx="11064240" cy="4937760"/>
+          </a:xfrm>
+          <a:prstGeom prst="rect">
+            <a:avLst/>
+          </a:prstGeom>
+          <a:noFill/>
+        </p:spPr>
+        <p:txBody>
+          <a:bodyPr wrap="square">
+            <a:noAutofit/>
+          </a:bodyPr>
+          <a:lstStyle/>
+          <a:p>
+            <a:pPr>
+              <a:lnSpc>
+                <a:spcPts val="2200"/>
+              </a:lnSpc>
+              <a:spcAft>
+                <a:spcPts val="1000"/>
+              </a:spcAft>
+              <a:defRPr sz="2000" b="0">
+                <a:solidFill>
+                  <a:srgbClr val="333333"/>
+                </a:solidFill>
+                <a:latin typeface="Calibri"/>
+              </a:defRPr>
+            </a:pPr>
+            <a:r>
+              <a:t>• Run spi_uvm</a:t>
+            </a:r>
+          </a:p>
+          <a:p>
+            <a:pPr>
+              <a:lnSpc>
+                <a:spcPts val="2200"/>
+              </a:lnSpc>
+              <a:spcAft>
+                <a:spcPts val="1000"/>
+              </a:spcAft>
+              <a:defRPr sz="2000" b="0">
+                <a:solidFill>
+                  <a:srgbClr val="333333"/>
+                </a:solidFill>
+                <a:latin typeface="Calibri"/>
+              </a:defRPr>
+            </a:pPr>
+            <a:r>
+              <a:t>• Trace one transaction</a:t>
+            </a:r>
+          </a:p>
+          <a:p>
+            <a:pPr>
+              <a:lnSpc>
+                <a:spcPts val="2200"/>
+              </a:lnSpc>
+              <a:spcAft>
+                <a:spcPts val="1000"/>
+              </a:spcAft>
+              <a:defRPr sz="2000" b="0">
+                <a:solidFill>
+                  <a:srgbClr val="333333"/>
+                </a:solidFill>
+                <a:latin typeface="Calibri"/>
+              </a:defRPr>
+            </a:pPr>
+            <a:r>
+              <a:t>• Change the sequence</a:t>
+            </a:r>
+          </a:p>
+          <a:p>
+            <a:pPr>
+              <a:lnSpc>
+                <a:spcPts val="2200"/>
+              </a:lnSpc>
+              <a:spcAft>
+                <a:spcPts val="1000"/>
+              </a:spcAft>
+              <a:defRPr sz="2000" b="0">
+                <a:solidFill>
+                  <a:srgbClr val="333333"/>
+                </a:solidFill>
+                <a:latin typeface="Calibri"/>
+              </a:defRPr>
+            </a:pPr>
+            <a:r>
+              <a:t>• Optional: Compare to UART UVM</a:t>
+            </a:r>
+          </a:p>
+        </p:txBody>
+      </p:sp>
+      <p:sp>
+        <p:nvSpPr>
+          <p:cNvPr id="4" name="TextBox 3"/>
+          <p:cNvSpPr txBox="1"/>
+          <p:nvPr/>
+        </p:nvSpPr>
+        <p:spPr>
+          <a:xfrm>
+            <a:off x="548640" y="6355080"/>
+            <a:ext cx="11064240" cy="320040"/>
+          </a:xfrm>
+          <a:prstGeom prst="rect">
+            <a:avLst/>
+          </a:prstGeom>
+          <a:noFill/>
+        </p:spPr>
+        <p:txBody>
+          <a:bodyPr wrap="square">
+            <a:noAutofit/>
+          </a:bodyPr>
+          <a:lstStyle/>
+          <a:p>
+            <a:pPr algn="r">
+              <a:lnSpc>
+                <a:spcPts val="2200"/>
+              </a:lnSpc>
+              <a:defRPr sz="1000" b="0">
+                <a:solidFill>
+                  <a:srgbClr val="666666"/>
+                </a:solidFill>
+                <a:latin typeface="Calibri"/>
+              </a:defRPr>
+            </a:pPr>
+            <a:r>
+              <a:t>learn_uart_spi_i2c / Module 6</a:t>
+            </a:r>
+          </a:p>
+        </p:txBody>
+      </p:sp>
+    </p:spTree>
+  </p:cSld>
+  <p:clrMapOvr>
+    <a:masterClrMapping/>
+  </p:clrMapOvr>
+</p:sld>
+</file>
+
+<file path=ppt/slides/slide41.xml><?xml version="1.0" encoding="utf-8"?>
+<p:sld xmlns:a="http://schemas.openxmlformats.org/drawingml/2006/main" xmlns:p="http://schemas.openxmlformats.org/presentationml/2006/main" xmlns:r="http://schemas.openxmlformats.org/officeDocument/2006/relationships">
+  <p:cSld>
+    <p:spTree>
+      <p:nvGrpSpPr>
+        <p:cNvPr id="1" name=""/>
+        <p:cNvGrpSpPr/>
+        <p:nvPr/>
+      </p:nvGrpSpPr>
+      <p:grpSpPr/>
+      <p:sp>
+        <p:nvSpPr>
+          <p:cNvPr id="2" name="TextBox 1"/>
+          <p:cNvSpPr txBox="1"/>
+          <p:nvPr/>
+        </p:nvSpPr>
+        <p:spPr>
+          <a:xfrm>
+            <a:off x="548640" y="411480"/>
+            <a:ext cx="11064240" cy="777240"/>
+          </a:xfrm>
+          <a:prstGeom prst="rect">
+            <a:avLst/>
+          </a:prstGeom>
+          <a:noFill/>
+        </p:spPr>
+        <p:txBody>
+          <a:bodyPr wrap="square">
+            <a:noAutofit/>
+          </a:bodyPr>
+          <a:lstStyle/>
+          <a:p>
+            <a:pPr>
+              <a:lnSpc>
+                <a:spcPts val="2200"/>
+              </a:lnSpc>
+              <a:defRPr sz="2800" b="1">
+                <a:solidFill>
+                  <a:srgbClr val="1A1A2E"/>
+                </a:solidFill>
+                <a:latin typeface="Calibri"/>
+              </a:defRPr>
+            </a:pPr>
+            <a:r>
+              <a:t>Assessment checklist</a:t>
+            </a:r>
+          </a:p>
+        </p:txBody>
+      </p:sp>
+      <p:sp>
+        <p:nvSpPr>
+          <p:cNvPr id="3" name="TextBox 2"/>
+          <p:cNvSpPr txBox="1"/>
+          <p:nvPr/>
+        </p:nvSpPr>
+        <p:spPr>
+          <a:xfrm>
+            <a:off x="548640" y="1234440"/>
+            <a:ext cx="11064240" cy="4937760"/>
+          </a:xfrm>
+          <a:prstGeom prst="rect">
+            <a:avLst/>
+          </a:prstGeom>
+          <a:noFill/>
+        </p:spPr>
+        <p:txBody>
+          <a:bodyPr wrap="square">
+            <a:noAutofit/>
+          </a:bodyPr>
+          <a:lstStyle/>
+          <a:p>
+            <a:pPr>
+              <a:lnSpc>
+                <a:spcPts val="2200"/>
+              </a:lnSpc>
+              <a:spcAft>
+                <a:spcPts val="1000"/>
+              </a:spcAft>
+              <a:defRPr sz="2000" b="0">
+                <a:solidFill>
+                  <a:srgbClr val="333333"/>
+                </a:solidFill>
+                <a:latin typeface="Calibri"/>
+              </a:defRPr>
+            </a:pPr>
+            <a:r>
+              <a:t>• Can describe the SPI UVM agent and how it maps to</a:t>
+            </a:r>
+          </a:p>
+          <a:p>
+            <a:pPr>
+              <a:lnSpc>
+                <a:spcPts val="2200"/>
+              </a:lnSpc>
+              <a:spcAft>
+                <a:spcPts val="1000"/>
+              </a:spcAft>
+              <a:defRPr sz="2000" b="0">
+                <a:solidFill>
+                  <a:srgbClr val="333333"/>
+                </a:solidFill>
+                <a:latin typeface="Calibri"/>
+              </a:defRPr>
+            </a:pPr>
+            <a:r>
+              <a:t>      SPI (one byte, mode 0 monitoring).</a:t>
+            </a:r>
+          </a:p>
+          <a:p>
+            <a:pPr>
+              <a:lnSpc>
+                <a:spcPts val="2200"/>
+              </a:lnSpc>
+              <a:spcAft>
+                <a:spcPts val="1000"/>
+              </a:spcAft>
+              <a:defRPr sz="2000" b="0">
+                <a:solidFill>
+                  <a:srgbClr val="333333"/>
+                </a:solidFill>
+                <a:latin typeface="Calibri"/>
+              </a:defRPr>
+            </a:pPr>
+            <a:r>
+              <a:t>• Can run spi_uvm and interpret UVM output.</a:t>
+            </a:r>
+          </a:p>
+          <a:p>
+            <a:pPr>
+              <a:lnSpc>
+                <a:spcPts val="2200"/>
+              </a:lnSpc>
+              <a:spcAft>
+                <a:spcPts val="1000"/>
+              </a:spcAft>
+              <a:defRPr sz="2000" b="0">
+                <a:solidFill>
+                  <a:srgbClr val="333333"/>
+                </a:solidFill>
+                <a:latin typeface="Calibri"/>
+              </a:defRPr>
+            </a:pPr>
+            <a:r>
+              <a:t>• Ready for Module 7: I²C protocol + RTL + basic</a:t>
+            </a:r>
+          </a:p>
+          <a:p>
+            <a:pPr>
+              <a:lnSpc>
+                <a:spcPts val="2200"/>
+              </a:lnSpc>
+              <a:spcAft>
+                <a:spcPts val="1000"/>
+              </a:spcAft>
+              <a:defRPr sz="2000" b="0">
+                <a:solidFill>
+                  <a:srgbClr val="333333"/>
+                </a:solidFill>
+                <a:latin typeface="Calibri"/>
+              </a:defRPr>
+            </a:pPr>
+            <a:r>
+              <a:t>      testbench.</a:t>
+            </a:r>
+          </a:p>
+        </p:txBody>
+      </p:sp>
+      <p:sp>
+        <p:nvSpPr>
+          <p:cNvPr id="4" name="TextBox 3"/>
+          <p:cNvSpPr txBox="1"/>
+          <p:nvPr/>
+        </p:nvSpPr>
+        <p:spPr>
+          <a:xfrm>
+            <a:off x="548640" y="6355080"/>
+            <a:ext cx="11064240" cy="320040"/>
+          </a:xfrm>
+          <a:prstGeom prst="rect">
+            <a:avLst/>
+          </a:prstGeom>
+          <a:noFill/>
+        </p:spPr>
+        <p:txBody>
+          <a:bodyPr wrap="square">
+            <a:noAutofit/>
+          </a:bodyPr>
+          <a:lstStyle/>
+          <a:p>
+            <a:pPr algn="r">
+              <a:lnSpc>
+                <a:spcPts val="2200"/>
+              </a:lnSpc>
+              <a:defRPr sz="1000" b="0">
+                <a:solidFill>
+                  <a:srgbClr val="666666"/>
+                </a:solidFill>
+                <a:latin typeface="Calibri"/>
+              </a:defRPr>
+            </a:pPr>
+            <a:r>
+              <a:t>learn_uart_spi_i2c / Module 6</a:t>
+            </a:r>
+          </a:p>
+        </p:txBody>
+      </p:sp>
+    </p:spTree>
+  </p:cSld>
+  <p:clrMapOvr>
+    <a:masterClrMapping/>
+  </p:clrMapOvr>
+</p:sld>
+</file>
+
+<file path=ppt/slides/slide42.xml><?xml version="1.0" encoding="utf-8"?>
+<p:sld xmlns:a="http://schemas.openxmlformats.org/drawingml/2006/main" xmlns:p="http://schemas.openxmlformats.org/presentationml/2006/main" xmlns:r="http://schemas.openxmlformats.org/officeDocument/2006/relationships">
+  <p:cSld>
+    <p:spTree>
+      <p:nvGrpSpPr>
+        <p:cNvPr id="1" name=""/>
+        <p:cNvGrpSpPr/>
+        <p:nvPr/>
+      </p:nvGrpSpPr>
+      <p:grpSpPr/>
+      <p:sp>
+        <p:nvSpPr>
+          <p:cNvPr id="2" name="TextBox 1"/>
+          <p:cNvSpPr txBox="1"/>
+          <p:nvPr/>
+        </p:nvSpPr>
+        <p:spPr>
+          <a:xfrm>
+            <a:off x="548640" y="411480"/>
+            <a:ext cx="11064240" cy="777240"/>
+          </a:xfrm>
+          <a:prstGeom prst="rect">
+            <a:avLst/>
+          </a:prstGeom>
+          <a:noFill/>
+        </p:spPr>
+        <p:txBody>
+          <a:bodyPr wrap="square">
+            <a:noAutofit/>
+          </a:bodyPr>
+          <a:lstStyle/>
+          <a:p>
+            <a:pPr>
+              <a:lnSpc>
+                <a:spcPts val="2200"/>
+              </a:lnSpc>
+              <a:defRPr sz="2800" b="1">
+                <a:solidFill>
+                  <a:srgbClr val="1A1A2E"/>
+                </a:solidFill>
+                <a:latin typeface="Calibri"/>
+              </a:defRPr>
+            </a:pPr>
+            <a:r>
+              <a:t>Summary &amp; next steps</a:t>
+            </a:r>
+          </a:p>
+        </p:txBody>
+      </p:sp>
+      <p:sp>
+        <p:nvSpPr>
+          <p:cNvPr id="3" name="TextBox 2"/>
+          <p:cNvSpPr txBox="1"/>
+          <p:nvPr/>
+        </p:nvSpPr>
+        <p:spPr>
+          <a:xfrm>
+            <a:off x="548640" y="1234440"/>
+            <a:ext cx="11064240" cy="4937760"/>
+          </a:xfrm>
+          <a:prstGeom prst="rect">
+            <a:avLst/>
+          </a:prstGeom>
+          <a:noFill/>
+        </p:spPr>
+        <p:txBody>
+          <a:bodyPr wrap="square">
+            <a:noAutofit/>
+          </a:bodyPr>
+          <a:lstStyle/>
+          <a:p>
+            <a:pPr>
+              <a:lnSpc>
+                <a:spcPts val="2200"/>
+              </a:lnSpc>
+              <a:spcAft>
+                <a:spcPts val="1000"/>
+              </a:spcAft>
+              <a:defRPr sz="2000" b="0">
+                <a:solidFill>
+                  <a:srgbClr val="333333"/>
+                </a:solidFill>
+                <a:latin typeface="Calibri"/>
+              </a:defRPr>
+            </a:pPr>
+            <a:r>
+              <a:t>• Extend SPI verification to **UVM+SV** — SPI agent</a:t>
+            </a:r>
+          </a:p>
+          <a:p>
+            <a:pPr>
+              <a:lnSpc>
+                <a:spcPts val="2200"/>
+              </a:lnSpc>
+              <a:spcAft>
+                <a:spcPts val="1000"/>
+              </a:spcAft>
+              <a:defRPr sz="2000" b="0">
+                <a:solidFill>
+                  <a:srgbClr val="333333"/>
+                </a:solidFill>
+                <a:latin typeface="Calibri"/>
+              </a:defRPr>
+            </a:pPr>
+            <a:r>
+              <a:t>      (transaction, sequence, driver, monitor, scoreboa…</a:t>
+            </a:r>
+          </a:p>
+          <a:p>
+            <a:pPr>
+              <a:lnSpc>
+                <a:spcPts val="2200"/>
+              </a:lnSpc>
+              <a:spcAft>
+                <a:spcPts val="1000"/>
+              </a:spcAft>
+              <a:defRPr sz="2000" b="0">
+                <a:solidFill>
+                  <a:srgbClr val="333333"/>
+                </a:solidFill>
+                <a:latin typeface="Calibri"/>
+              </a:defRPr>
+            </a:pPr>
+            <a:r>
+              <a:t>• Complete module6/CHECKLIST.md</a:t>
+            </a:r>
+          </a:p>
+          <a:p>
+            <a:pPr>
+              <a:lnSpc>
+                <a:spcPts val="2200"/>
+              </a:lnSpc>
+              <a:spcAft>
+                <a:spcPts val="1000"/>
+              </a:spcAft>
+              <a:defRPr sz="2000" b="0">
+                <a:solidFill>
+                  <a:srgbClr val="333333"/>
+                </a:solidFill>
+                <a:latin typeface="Calibri"/>
+              </a:defRPr>
+            </a:pPr>
+            <a:r>
+              <a:t>• Review module6/EXAMPLES.md and run each lab</a:t>
+            </a:r>
+          </a:p>
+          <a:p>
+            <a:pPr>
+              <a:lnSpc>
+                <a:spcPts val="2200"/>
+              </a:lnSpc>
+              <a:spcAft>
+                <a:spcPts val="1000"/>
+              </a:spcAft>
+              <a:defRPr sz="2000" b="0">
+                <a:solidFill>
+                  <a:srgbClr val="333333"/>
+                </a:solidFill>
+                <a:latin typeface="Calibri"/>
+              </a:defRPr>
+            </a:pPr>
+            <a:r>
+              <a:t>• Next: I²C</a:t>
+            </a:r>
+          </a:p>
+        </p:txBody>
+      </p:sp>
+      <p:sp>
+        <p:nvSpPr>
+          <p:cNvPr id="4" name="TextBox 3"/>
+          <p:cNvSpPr txBox="1"/>
+          <p:nvPr/>
+        </p:nvSpPr>
+        <p:spPr>
+          <a:xfrm>
+            <a:off x="548640" y="6355080"/>
+            <a:ext cx="11064240" cy="320040"/>
+          </a:xfrm>
+          <a:prstGeom prst="rect">
+            <a:avLst/>
+          </a:prstGeom>
+          <a:noFill/>
+        </p:spPr>
+        <p:txBody>
+          <a:bodyPr wrap="square">
+            <a:noAutofit/>
+          </a:bodyPr>
+          <a:lstStyle/>
+          <a:p>
+            <a:pPr algn="r">
+              <a:lnSpc>
+                <a:spcPts val="2200"/>
+              </a:lnSpc>
+              <a:defRPr sz="1000" b="0">
+                <a:solidFill>
+                  <a:srgbClr val="666666"/>
+                </a:solidFill>
+                <a:latin typeface="Calibri"/>
+              </a:defRPr>
+            </a:pPr>
+            <a:r>
+              <a:t>learn_uart_spi_i2c / Module 6</a:t>
+            </a:r>
+          </a:p>
+        </p:txBody>
+      </p:sp>
+    </p:spTree>
+  </p:cSld>
+  <p:clrMapOvr>
+    <a:masterClrMapping/>
+  </p:clrMapOvr>
+</p:sld>
+</file>
+
 <file path=ppt/slides/slide5.xml><?xml version="1.0" encoding="utf-8"?>
 <p:sld xmlns:a="http://schemas.openxmlformats.org/drawingml/2006/main" xmlns:p="http://schemas.openxmlformats.org/presentationml/2006/main" xmlns:r="http://schemas.openxmlformats.org/officeDocument/2006/relationships">
   <p:cSld>
@@ -9290,14 +12461,113 @@
               </a:defRPr>
             </a:pPr>
             <a:r>
-              <a:t>RTL / block architecture</a:t>
+              <a:t>1. SPI DUT (reused from Module 5)</a:t>
+            </a:r>
+          </a:p>
+        </p:txBody>
+      </p:sp>
+      <p:sp>
+        <p:nvSpPr>
+          <p:cNvPr id="3" name="TextBox 2"/>
+          <p:cNvSpPr txBox="1"/>
+          <p:nvPr/>
+        </p:nvSpPr>
+        <p:spPr>
+          <a:xfrm>
+            <a:off x="548640" y="1234440"/>
+            <a:ext cx="5303520" cy="4754880"/>
+          </a:xfrm>
+          <a:prstGeom prst="rect">
+            <a:avLst/>
+          </a:prstGeom>
+          <a:noFill/>
+        </p:spPr>
+        <p:txBody>
+          <a:bodyPr wrap="square">
+            <a:noAutofit/>
+          </a:bodyPr>
+          <a:lstStyle/>
+          <a:p>
+            <a:pPr>
+              <a:lnSpc>
+                <a:spcPts val="2200"/>
+              </a:lnSpc>
+              <a:spcAft>
+                <a:spcPts val="1000"/>
+              </a:spcAft>
+              <a:defRPr sz="2000" b="0">
+                <a:solidFill>
+                  <a:srgbClr val="333333"/>
+                </a:solidFill>
+                <a:latin typeface="Calibri"/>
+              </a:defRPr>
+            </a:pPr>
+            <a:r>
+              <a:t>• spi_master + clk_div in</a:t>
+            </a:r>
+          </a:p>
+          <a:p>
+            <a:pPr>
+              <a:lnSpc>
+                <a:spcPts val="2200"/>
+              </a:lnSpc>
+              <a:spcAft>
+                <a:spcPts val="1000"/>
+              </a:spcAft>
+              <a:defRPr sz="2000" b="0">
+                <a:solidFill>
+                  <a:srgbClr val="333333"/>
+                </a:solidFill>
+                <a:latin typeface="Calibri"/>
+              </a:defRPr>
+            </a:pPr>
+            <a:r>
+              <a:t>      `module6/examples/spi_uvm/dut/`.</a:t>
+            </a:r>
+          </a:p>
+          <a:p>
+            <a:pPr>
+              <a:lnSpc>
+                <a:spcPts val="2200"/>
+              </a:lnSpc>
+              <a:spcAft>
+                <a:spcPts val="1000"/>
+              </a:spcAft>
+              <a:defRPr sz="2000" b="0">
+                <a:solidFill>
+                  <a:srgbClr val="333333"/>
+                </a:solidFill>
+                <a:latin typeface="Calibri"/>
+              </a:defRPr>
+            </a:pPr>
+            <a:r>
+              <a:t>• spi_master_if connects UVM to</a:t>
+            </a:r>
+          </a:p>
+          <a:p>
+            <a:pPr>
+              <a:lnSpc>
+                <a:spcPts val="2200"/>
+              </a:lnSpc>
+              <a:spcAft>
+                <a:spcPts val="1000"/>
+              </a:spcAft>
+              <a:defRPr sz="2000" b="0">
+                <a:solidFill>
+                  <a:srgbClr val="333333"/>
+                </a:solidFill>
+                <a:latin typeface="Calibri"/>
+              </a:defRPr>
+            </a:pPr>
+            <a:r>
+              <a:t>      DUT pins.</a:t>
             </a:r>
           </a:p>
         </p:txBody>
       </p:sp>
       <p:pic>
         <p:nvPicPr>
-          <p:cNvPr id="3" name="Picture 2" descr="rtl_architecture.png"/>
+          <p:cNvPr id="4" name="Picture 3" descr="rtl_architecture.png"/>
           <p:cNvPicPr>
             <a:picLocks noChangeAspect="1"/>
           </p:cNvPicPr>
@@ -9311,53 +12581,14 @@
         </p:blipFill>
         <p:spPr>
           <a:xfrm>
-            <a:off x="548640" y="1143000"/>
-            <a:ext cx="8128000" cy="4572000"/>
+            <a:off x="6172200" y="2094547"/>
+            <a:ext cx="5394960" cy="3034665"/>
           </a:xfrm>
           <a:prstGeom prst="rect">
             <a:avLst/>
           </a:prstGeom>
         </p:spPr>
       </p:pic>
-      <p:sp>
-        <p:nvSpPr>
-          <p:cNvPr id="4" name="TextBox 3"/>
-          <p:cNvSpPr txBox="1"/>
-          <p:nvPr/>
-        </p:nvSpPr>
-        <p:spPr>
-          <a:xfrm>
-            <a:off x="548640" y="5897880"/>
-            <a:ext cx="11064240" cy="411480"/>
-          </a:xfrm>
-          <a:prstGeom prst="rect">
-            <a:avLst/>
-          </a:prstGeom>
-          <a:noFill/>
-        </p:spPr>
-        <p:txBody>
-          <a:bodyPr wrap="square">
-            <a:noAutofit/>
-          </a:bodyPr>
-          <a:lstStyle/>
-          <a:p>
-            <a:pPr>
-              <a:lnSpc>
-                <a:spcPts val="2200"/>
-              </a:lnSpc>
-              <a:defRPr sz="1200" b="0">
-                <a:solidFill>
-                  <a:srgbClr val="333333"/>
-                </a:solidFill>
-                <a:latin typeface="Calibri"/>
-              </a:defRPr>
-            </a:pPr>
-            <a:r>
-              <a:t>Module 6: DUT / block hierarchy (see module6/examples/).</a:t>
-            </a:r>
-          </a:p>
-        </p:txBody>
-      </p:sp>
       <p:sp>
         <p:nvSpPr>
           <p:cNvPr id="5" name="TextBox 4"/>
